--- a/public/data/etude_quantitative/rapport_presentation.pptx
+++ b/public/data/etude_quantitative/rapport_presentation.pptx
@@ -1890,10 +1890,6 @@
           </a:solidFill>
           <a:ln/>
         </p:spPr>
-        <p:txBody>
-          <a:bodyPr/>
-          <a:p/>
-        </p:txBody>
       </p:sp>
       <p:sp>
         <p:nvSpPr>
@@ -2434,10 +2430,6 @@
           </a:solidFill>
           <a:ln/>
         </p:spPr>
-        <p:txBody>
-          <a:bodyPr/>
-          <a:p/>
-        </p:txBody>
       </p:sp>
       <p:sp>
         <p:nvSpPr>
@@ -2710,10 +2702,6 @@
           </a:solidFill>
           <a:ln/>
         </p:spPr>
-        <p:txBody>
-          <a:bodyPr/>
-          <a:p/>
-        </p:txBody>
       </p:sp>
       <p:sp>
         <p:nvSpPr>
@@ -2734,10 +2722,6 @@
           </a:solidFill>
           <a:ln/>
         </p:spPr>
-        <p:txBody>
-          <a:bodyPr/>
-          <a:p/>
-        </p:txBody>
       </p:sp>
       <p:pic>
         <p:nvPicPr>
@@ -3579,10 +3563,6 @@
           </a:solidFill>
           <a:ln/>
         </p:spPr>
-        <p:txBody>
-          <a:bodyPr/>
-          <a:p/>
-        </p:txBody>
       </p:sp>
       <p:sp>
         <p:nvSpPr>
@@ -3899,10 +3879,6 @@
           </a:solidFill>
           <a:ln/>
         </p:spPr>
-        <p:txBody>
-          <a:bodyPr/>
-          <a:p/>
-        </p:txBody>
       </p:sp>
       <p:sp>
         <p:nvSpPr>
@@ -3923,10 +3899,6 @@
           </a:solidFill>
           <a:ln/>
         </p:spPr>
-        <p:txBody>
-          <a:bodyPr/>
-          <a:p/>
-        </p:txBody>
       </p:sp>
       <p:sp>
         <p:nvSpPr>
@@ -4142,10 +4114,6 @@
           </a:solidFill>
           <a:ln/>
         </p:spPr>
-        <p:txBody>
-          <a:bodyPr/>
-          <a:p/>
-        </p:txBody>
       </p:sp>
       <p:sp>
         <p:nvSpPr>
@@ -4166,10 +4134,6 @@
           </a:solidFill>
           <a:ln/>
         </p:spPr>
-        <p:txBody>
-          <a:bodyPr/>
-          <a:p/>
-        </p:txBody>
       </p:sp>
       <p:sp>
         <p:nvSpPr>
@@ -5201,7 +5165,7 @@
         <p:spPr>
           <a:xfrm>
             <a:off x="0" y="0"/>
-            <a:ext cx="9144000" cy="5170736"/>
+            <a:ext cx="9144000" cy="5143500"/>
           </a:xfrm>
           <a:prstGeom prst="rect">
             <a:avLst/>
@@ -5217,7 +5181,7 @@
         <p:spPr>
           <a:xfrm>
             <a:off x="0" y="0"/>
-            <a:ext cx="800100" cy="5170736"/>
+            <a:ext cx="800100" cy="5143500"/>
           </a:xfrm>
           <a:prstGeom prst="rect">
             <a:avLst/>
@@ -5227,10 +5191,6 @@
           </a:solidFill>
           <a:ln/>
         </p:spPr>
-        <p:txBody>
-          <a:bodyPr/>
-          <a:p/>
-        </p:txBody>
       </p:sp>
       <p:sp>
         <p:nvSpPr>
@@ -5240,7 +5200,7 @@
         </p:nvSpPr>
         <p:spPr>
           <a:xfrm>
-            <a:off x="228600" y="242888"/>
+            <a:off x="228600" y="185738"/>
             <a:ext cx="342900" cy="342900"/>
           </a:xfrm>
           <a:prstGeom prst="rect">
@@ -5281,8 +5241,8 @@
         </p:nvSpPr>
         <p:spPr>
           <a:xfrm rot="10800000">
-            <a:off x="348258" y="2360340"/>
-            <a:ext cx="103584" cy="710803"/>
+            <a:off x="353616" y="2402644"/>
+            <a:ext cx="92869" cy="738262"/>
           </a:xfrm>
           <a:prstGeom prst="rect">
             <a:avLst/>
@@ -5322,8 +5282,8 @@
         </p:nvSpPr>
         <p:spPr>
           <a:xfrm>
-            <a:off x="360759" y="4845695"/>
-            <a:ext cx="78581" cy="110728"/>
+            <a:off x="341226" y="5014913"/>
+            <a:ext cx="117593" cy="100013"/>
           </a:xfrm>
           <a:prstGeom prst="rect">
             <a:avLst/>
@@ -5363,8 +5323,8 @@
         </p:nvSpPr>
         <p:spPr>
           <a:xfrm>
-            <a:off x="1343025" y="328613"/>
-            <a:ext cx="5286375" cy="110728"/>
+            <a:off x="1285875" y="257175"/>
+            <a:ext cx="4008872" cy="100013"/>
           </a:xfrm>
           <a:prstGeom prst="rect">
             <a:avLst/>
@@ -5404,8 +5364,8 @@
         </p:nvSpPr>
         <p:spPr>
           <a:xfrm>
-            <a:off x="1343025" y="525066"/>
-            <a:ext cx="5286375" cy="337152"/>
+            <a:off x="1285875" y="421481"/>
+            <a:ext cx="4008872" cy="312148"/>
           </a:xfrm>
           <a:prstGeom prst="rect">
             <a:avLst/>
@@ -5421,12 +5381,12 @@
           <a:p>
             <a:pPr algn="l" indent="0" marL="0">
               <a:lnSpc>
-                <a:spcPct val="94400"/>
+                <a:spcPct val="92000"/>
               </a:lnSpc>
               <a:buNone/>
             </a:pPr>
             <a:r>
-              <a:rPr lang="en-US" sz="2000" b="1" dirty="0">
+              <a:rPr lang="en-US" sz="1900" b="1" dirty="0">
                 <a:solidFill>
                   <a:srgbClr val="102A43"/>
                 </a:solidFill>
@@ -5436,7 +5396,7 @@
               </a:rPr>
               <a:t>Mesurer, documenter, puis décider</a:t>
             </a:r>
-            <a:endParaRPr lang="en-US" sz="2000" dirty="0"/>
+            <a:endParaRPr lang="en-US" sz="1900" dirty="0"/>
           </a:p>
         </p:txBody>
       </p:sp>
@@ -5448,8 +5408,8 @@
         </p:nvSpPr>
         <p:spPr>
           <a:xfrm>
-            <a:off x="8051006" y="328613"/>
-            <a:ext cx="592931" cy="557213"/>
+            <a:off x="8186738" y="257175"/>
+            <a:ext cx="514350" cy="514350"/>
           </a:xfrm>
           <a:prstGeom prst="rect">
             <a:avLst/>
@@ -5470,7 +5430,7 @@
               <a:buNone/>
             </a:pPr>
             <a:r>
-              <a:rPr lang="en-US" sz="4300" dirty="0">
+              <a:rPr lang="en-US" sz="3950" dirty="0">
                 <a:solidFill>
                   <a:srgbClr val="D9E2EC"/>
                 </a:solidFill>
@@ -5480,7 +5440,7 @@
               </a:rPr>
               <a:t>12</a:t>
             </a:r>
-            <a:endParaRPr lang="en-US" sz="4300" dirty="0"/>
+            <a:endParaRPr lang="en-US" sz="3950" dirty="0"/>
           </a:p>
         </p:txBody>
       </p:sp>
@@ -5492,8 +5452,8 @@
         </p:nvSpPr>
         <p:spPr>
           <a:xfrm>
-            <a:off x="1343025" y="1293019"/>
-            <a:ext cx="3464719" cy="214313"/>
+            <a:off x="1285875" y="1064419"/>
+            <a:ext cx="3550444" cy="182166"/>
           </a:xfrm>
           <a:prstGeom prst="rect">
             <a:avLst/>
@@ -5511,7 +5471,7 @@
               <a:buNone/>
             </a:pPr>
             <a:r>
-              <a:rPr lang="en-US" sz="1200" b="1" dirty="0">
+              <a:rPr lang="en-US" sz="1100" b="1" dirty="0">
                 <a:solidFill>
                   <a:srgbClr val="102A43"/>
                 </a:solidFill>
@@ -5521,7 +5481,7 @@
               </a:rPr>
               <a:t>Ce que l’étude établit</a:t>
             </a:r>
-            <a:endParaRPr lang="en-US" sz="1200" dirty="0"/>
+            <a:endParaRPr lang="en-US" sz="1100" dirty="0"/>
           </a:p>
         </p:txBody>
       </p:sp>
@@ -5533,8 +5493,8 @@
         </p:nvSpPr>
         <p:spPr>
           <a:xfrm>
-            <a:off x="1343025" y="1743075"/>
-            <a:ext cx="385763" cy="334305"/>
+            <a:off x="1285875" y="1382316"/>
+            <a:ext cx="342900" cy="406859"/>
           </a:xfrm>
           <a:prstGeom prst="rect">
             <a:avLst/>
@@ -5552,7 +5512,7 @@
               <a:buNone/>
             </a:pPr>
             <a:r>
-              <a:rPr lang="en-US" sz="1500" dirty="0">
+              <a:rPr lang="en-US" sz="1400" dirty="0">
                 <a:solidFill>
                   <a:srgbClr val="2D7D7B"/>
                 </a:solidFill>
@@ -5562,7 +5522,7 @@
               </a:rPr>
               <a:t>01</a:t>
             </a:r>
-            <a:endParaRPr lang="en-US" sz="1500" dirty="0"/>
+            <a:endParaRPr lang="en-US" sz="1400" dirty="0"/>
           </a:p>
         </p:txBody>
       </p:sp>
@@ -5574,8 +5534,8 @@
         </p:nvSpPr>
         <p:spPr>
           <a:xfrm>
-            <a:off x="1835944" y="1743075"/>
-            <a:ext cx="2971800" cy="139303"/>
+            <a:off x="1721644" y="1382316"/>
+            <a:ext cx="3114675" cy="114300"/>
           </a:xfrm>
           <a:prstGeom prst="rect">
             <a:avLst/>
@@ -5593,7 +5553,7 @@
               <a:buNone/>
             </a:pPr>
             <a:r>
-              <a:rPr lang="en-US" sz="750" b="1" spc="1" kern="0" dirty="0">
+              <a:rPr lang="en-US" sz="700" b="1" spc="1" kern="0" dirty="0">
                 <a:solidFill>
                   <a:srgbClr val="102A43"/>
                 </a:solidFill>
@@ -5603,7 +5563,7 @@
               </a:rPr>
               <a:t>RÉSULTAT CENTRAL</a:t>
             </a:r>
-            <a:endParaRPr lang="en-US" sz="750" dirty="0"/>
+            <a:endParaRPr lang="en-US" sz="700" dirty="0"/>
           </a:p>
         </p:txBody>
       </p:sp>
@@ -5615,29 +5575,29 @@
         </p:nvSpPr>
         <p:spPr>
           <a:xfrm>
-            <a:off x="1835944" y="1925241"/>
-            <a:ext cx="2971800" cy="152140"/>
-          </a:xfrm>
-          <a:prstGeom prst="rect">
-            <a:avLst/>
-          </a:prstGeom>
-          <a:noFill/>
-          <a:ln/>
-        </p:spPr>
-        <p:txBody>
-          <a:bodyPr wrap="none" lIns="0" tIns="0" rIns="0" bIns="0" rtlCol="0" anchor="t">
+            <a:off x="1721644" y="1525191"/>
+            <a:ext cx="3114675" cy="263984"/>
+          </a:xfrm>
+          <a:prstGeom prst="rect">
+            <a:avLst/>
+          </a:prstGeom>
+          <a:noFill/>
+          <a:ln/>
+        </p:spPr>
+        <p:txBody>
+          <a:bodyPr wrap="square" lIns="0" tIns="0" rIns="0" bIns="0" rtlCol="0" anchor="t">
             <a:spAutoFit/>
           </a:bodyPr>
           <a:lstStyle/>
           <a:p>
             <a:pPr algn="l" indent="0" marL="0">
               <a:lnSpc>
-                <a:spcPct val="113600"/>
+                <a:spcPct val="105600"/>
               </a:lnSpc>
               <a:buNone/>
             </a:pPr>
             <a:r>
-              <a:rPr lang="en-US" sz="750" b="1" dirty="0">
+              <a:rPr lang="en-US" sz="700" b="1" dirty="0">
                 <a:solidFill>
                   <a:srgbClr val="486581"/>
                 </a:solidFill>
@@ -5645,10 +5605,10 @@
                 <a:ea typeface="DM Sans Bold" pitchFamily="34" charset="-122"/>
                 <a:cs typeface="DM Sans Bold" pitchFamily="34" charset="-120"/>
               </a:rPr>
-              <a:t>1 311 Labels</a:t>
-            </a:r>
-            <a:r>
-              <a:rPr lang="en-US" sz="800" dirty="0">
+              <a:t>1 356 Labels</a:t>
+            </a:r>
+            <a:r>
+              <a:rPr lang="en-US" sz="750" dirty="0">
                 <a:solidFill>
                   <a:srgbClr val="486581"/>
                 </a:solidFill>
@@ -5659,7 +5619,7 @@
               <a:t> et </a:t>
             </a:r>
             <a:r>
-              <a:rPr lang="en-US" sz="750" b="1" dirty="0">
+              <a:rPr lang="en-US" sz="700" b="1" dirty="0">
                 <a:solidFill>
                   <a:srgbClr val="486581"/>
                 </a:solidFill>
@@ -5667,10 +5627,10 @@
                 <a:ea typeface="DM Sans Bold" pitchFamily="34" charset="-122"/>
                 <a:cs typeface="DM Sans Bold" pitchFamily="34" charset="-120"/>
               </a:rPr>
-              <a:t>623 Prélabels</a:t>
-            </a:r>
-            <a:r>
-              <a:rPr lang="en-US" sz="800" dirty="0">
+              <a:t>641 Prélabels</a:t>
+            </a:r>
+            <a:r>
+              <a:rPr lang="en-US" sz="750" dirty="0">
                 <a:solidFill>
                   <a:srgbClr val="486581"/>
                 </a:solidFill>
@@ -5678,9 +5638,20 @@
                 <a:ea typeface="DM Sans" pitchFamily="34" charset="-122"/>
                 <a:cs typeface="DM Sans" pitchFamily="34" charset="-120"/>
               </a:rPr>
-              <a:t> sur 85 sessions corrigées.</a:t>
-            </a:r>
-            <a:endParaRPr lang="en-US" sz="750" dirty="0"/>
+              <a:t>, soit 1 997 décisions positives </a:t>
+            </a:r>
+            <a:r>
+              <a:rPr lang="en-US" sz="750" dirty="0">
+                <a:solidFill>
+                  <a:srgbClr val="486581"/>
+                </a:solidFill>
+                <a:latin typeface="DM Sans" pitchFamily="34" charset="0"/>
+                <a:ea typeface="DM Sans" pitchFamily="34" charset="-122"/>
+                <a:cs typeface="DM Sans" pitchFamily="34" charset="-120"/>
+              </a:rPr>
+              <a:t>officielles sur 88 sessions.</a:t>
+            </a:r>
+            <a:endParaRPr lang="en-US" sz="700" dirty="0"/>
           </a:p>
         </p:txBody>
       </p:sp>
@@ -5692,8 +5663,8 @@
         </p:nvSpPr>
         <p:spPr>
           <a:xfrm>
-            <a:off x="1343025" y="2284549"/>
-            <a:ext cx="385763" cy="486445"/>
+            <a:off x="1285875" y="1924906"/>
+            <a:ext cx="342900" cy="406859"/>
           </a:xfrm>
           <a:prstGeom prst="rect">
             <a:avLst/>
@@ -5711,7 +5682,7 @@
               <a:buNone/>
             </a:pPr>
             <a:r>
-              <a:rPr lang="en-US" sz="1500" dirty="0">
+              <a:rPr lang="en-US" sz="1400" dirty="0">
                 <a:solidFill>
                   <a:srgbClr val="2D7D7B"/>
                 </a:solidFill>
@@ -5721,7 +5692,7 @@
               </a:rPr>
               <a:t>02</a:t>
             </a:r>
-            <a:endParaRPr lang="en-US" sz="1500" dirty="0"/>
+            <a:endParaRPr lang="en-US" sz="1400" dirty="0"/>
           </a:p>
         </p:txBody>
       </p:sp>
@@ -5733,8 +5704,8 @@
         </p:nvSpPr>
         <p:spPr>
           <a:xfrm>
-            <a:off x="1835944" y="2284549"/>
-            <a:ext cx="2971800" cy="139303"/>
+            <a:off x="1721644" y="1924906"/>
+            <a:ext cx="3114675" cy="114300"/>
           </a:xfrm>
           <a:prstGeom prst="rect">
             <a:avLst/>
@@ -5752,7 +5723,7 @@
               <a:buNone/>
             </a:pPr>
             <a:r>
-              <a:rPr lang="en-US" sz="750" b="1" spc="1" kern="0" dirty="0">
+              <a:rPr lang="en-US" sz="700" b="1" spc="1" kern="0" dirty="0">
                 <a:solidFill>
                   <a:srgbClr val="102A43"/>
                 </a:solidFill>
@@ -5762,7 +5733,7 @@
               </a:rPr>
               <a:t>TRAJECTOIRE</a:t>
             </a:r>
-            <a:endParaRPr lang="en-US" sz="750" dirty="0"/>
+            <a:endParaRPr lang="en-US" sz="700" dirty="0"/>
           </a:p>
         </p:txBody>
       </p:sp>
@@ -5774,8 +5745,8 @@
         </p:nvSpPr>
         <p:spPr>
           <a:xfrm>
-            <a:off x="1835944" y="2466715"/>
-            <a:ext cx="2971800" cy="304279"/>
+            <a:off x="1721644" y="2067781"/>
+            <a:ext cx="3114675" cy="263984"/>
           </a:xfrm>
           <a:prstGeom prst="rect">
             <a:avLst/>
@@ -5791,12 +5762,12 @@
           <a:p>
             <a:pPr algn="l" indent="0" marL="0">
               <a:lnSpc>
-                <a:spcPct val="113600"/>
+                <a:spcPct val="105600"/>
               </a:lnSpc>
               <a:buNone/>
             </a:pPr>
             <a:r>
-              <a:rPr lang="en-US" sz="800" dirty="0">
+              <a:rPr lang="en-US" sz="750" dirty="0">
                 <a:solidFill>
                   <a:srgbClr val="486581"/>
                 </a:solidFill>
@@ -5804,9 +5775,9 @@
                 <a:ea typeface="DM Sans" pitchFamily="34" charset="-122"/>
                 <a:cs typeface="DM Sans" pitchFamily="34" charset="-120"/>
               </a:rPr>
-              <a:t>2021 concentre le plus grand volume de candidatures avec 478 dossiers.</a:t>
-            </a:r>
-            <a:endParaRPr lang="en-US" sz="800" dirty="0"/>
+              <a:t>2021 concentre le plus grand volume avec 478 candidatures et 243 Labels.</a:t>
+            </a:r>
+            <a:endParaRPr lang="en-US" sz="750" dirty="0"/>
           </a:p>
         </p:txBody>
       </p:sp>
@@ -5818,8 +5789,8 @@
         </p:nvSpPr>
         <p:spPr>
           <a:xfrm>
-            <a:off x="1343025" y="2978162"/>
-            <a:ext cx="385763" cy="486445"/>
+            <a:off x="1285875" y="2467496"/>
+            <a:ext cx="342900" cy="538851"/>
           </a:xfrm>
           <a:prstGeom prst="rect">
             <a:avLst/>
@@ -5837,7 +5808,7 @@
               <a:buNone/>
             </a:pPr>
             <a:r>
-              <a:rPr lang="en-US" sz="1500" dirty="0">
+              <a:rPr lang="en-US" sz="1400" dirty="0">
                 <a:solidFill>
                   <a:srgbClr val="2D7D7B"/>
                 </a:solidFill>
@@ -5847,7 +5818,7 @@
               </a:rPr>
               <a:t>03</a:t>
             </a:r>
-            <a:endParaRPr lang="en-US" sz="1500" dirty="0"/>
+            <a:endParaRPr lang="en-US" sz="1400" dirty="0"/>
           </a:p>
         </p:txBody>
       </p:sp>
@@ -5859,8 +5830,8 @@
         </p:nvSpPr>
         <p:spPr>
           <a:xfrm>
-            <a:off x="1835944" y="2978162"/>
-            <a:ext cx="2971800" cy="139303"/>
+            <a:off x="1721644" y="2467496"/>
+            <a:ext cx="3114675" cy="114300"/>
           </a:xfrm>
           <a:prstGeom prst="rect">
             <a:avLst/>
@@ -5878,7 +5849,7 @@
               <a:buNone/>
             </a:pPr>
             <a:r>
-              <a:rPr lang="en-US" sz="750" b="1" spc="1" kern="0" dirty="0">
+              <a:rPr lang="en-US" sz="700" b="1" spc="1" kern="0" dirty="0">
                 <a:solidFill>
                   <a:srgbClr val="102A43"/>
                 </a:solidFill>
@@ -5886,9 +5857,9 @@
                 <a:ea typeface="DM Sans Bold" pitchFamily="34" charset="-122"/>
                 <a:cs typeface="DM Sans Bold" pitchFamily="34" charset="-120"/>
               </a:rPr>
-              <a:t>TERRITOIRE</a:t>
-            </a:r>
-            <a:endParaRPr lang="en-US" sz="750" dirty="0"/>
+              <a:t>REPORTS CONFIRMÉS</a:t>
+            </a:r>
+            <a:endParaRPr lang="en-US" sz="700" dirty="0"/>
           </a:p>
         </p:txBody>
       </p:sp>
@@ -5900,8 +5871,8 @@
         </p:nvSpPr>
         <p:spPr>
           <a:xfrm>
-            <a:off x="1835944" y="3160328"/>
-            <a:ext cx="2971800" cy="304279"/>
+            <a:off x="1721644" y="2610371"/>
+            <a:ext cx="3114675" cy="395976"/>
           </a:xfrm>
           <a:prstGeom prst="rect">
             <a:avLst/>
@@ -5917,12 +5888,12 @@
           <a:p>
             <a:pPr algn="l" indent="0" marL="0">
               <a:lnSpc>
-                <a:spcPct val="113600"/>
+                <a:spcPct val="105600"/>
               </a:lnSpc>
               <a:buNone/>
             </a:pPr>
             <a:r>
-              <a:rPr lang="en-US" sz="800" dirty="0">
+              <a:rPr lang="en-US" sz="750" dirty="0">
                 <a:solidFill>
                   <a:srgbClr val="486581"/>
                 </a:solidFill>
@@ -5930,9 +5901,9 @@
                 <a:ea typeface="DM Sans" pitchFamily="34" charset="-122"/>
                 <a:cs typeface="DM Sans" pitchFamily="34" charset="-120"/>
               </a:rPr>
-              <a:t>Le Grand Tunis reste dominant, tandis que le Centre-Est progresse entre 2019 et 2021.</a:t>
-            </a:r>
-            <a:endParaRPr lang="en-US" sz="800" dirty="0"/>
+              <a:t>Cinq lignes Reporté sont confirmées : S11, S12, S28, S30 et S67. SHYK et RYBSEN restent suivies dans les sessions ultérieures publiées.</a:t>
+            </a:r>
+            <a:endParaRPr lang="en-US" sz="750" dirty="0"/>
           </a:p>
         </p:txBody>
       </p:sp>
@@ -5944,8 +5915,8 @@
         </p:nvSpPr>
         <p:spPr>
           <a:xfrm>
-            <a:off x="5179219" y="1293019"/>
-            <a:ext cx="3464719" cy="214313"/>
+            <a:off x="5150644" y="1064419"/>
+            <a:ext cx="3550444" cy="182166"/>
           </a:xfrm>
           <a:prstGeom prst="rect">
             <a:avLst/>
@@ -5963,7 +5934,7 @@
               <a:buNone/>
             </a:pPr>
             <a:r>
-              <a:rPr lang="en-US" sz="1200" b="1" dirty="0">
+              <a:rPr lang="en-US" sz="1100" b="1" dirty="0">
                 <a:solidFill>
                   <a:srgbClr val="102A43"/>
                 </a:solidFill>
@@ -5973,7 +5944,7 @@
               </a:rPr>
               <a:t>Ce qu’il faut encore documenter</a:t>
             </a:r>
-            <a:endParaRPr lang="en-US" sz="1200" dirty="0"/>
+            <a:endParaRPr lang="en-US" sz="1100" dirty="0"/>
           </a:p>
         </p:txBody>
       </p:sp>
@@ -5985,8 +5956,8 @@
         </p:nvSpPr>
         <p:spPr>
           <a:xfrm>
-            <a:off x="5179219" y="1743075"/>
-            <a:ext cx="385763" cy="486445"/>
+            <a:off x="5150644" y="1382316"/>
+            <a:ext cx="342900" cy="406859"/>
           </a:xfrm>
           <a:prstGeom prst="rect">
             <a:avLst/>
@@ -6004,7 +5975,7 @@
               <a:buNone/>
             </a:pPr>
             <a:r>
-              <a:rPr lang="en-US" sz="1500" dirty="0">
+              <a:rPr lang="en-US" sz="1400" dirty="0">
                 <a:solidFill>
                   <a:srgbClr val="D97706"/>
                 </a:solidFill>
@@ -6014,7 +5985,7 @@
               </a:rPr>
               <a:t>01</a:t>
             </a:r>
-            <a:endParaRPr lang="en-US" sz="1500" dirty="0"/>
+            <a:endParaRPr lang="en-US" sz="1400" dirty="0"/>
           </a:p>
         </p:txBody>
       </p:sp>
@@ -6026,8 +5997,8 @@
         </p:nvSpPr>
         <p:spPr>
           <a:xfrm>
-            <a:off x="5672138" y="1743075"/>
-            <a:ext cx="2971800" cy="139303"/>
+            <a:off x="5586413" y="1382316"/>
+            <a:ext cx="3114675" cy="114300"/>
           </a:xfrm>
           <a:prstGeom prst="rect">
             <a:avLst/>
@@ -6045,7 +6016,7 @@
               <a:buNone/>
             </a:pPr>
             <a:r>
-              <a:rPr lang="en-US" sz="750" b="1" spc="1" kern="0" dirty="0">
+              <a:rPr lang="en-US" sz="700" b="1" spc="1" kern="0" dirty="0">
                 <a:solidFill>
                   <a:srgbClr val="102A43"/>
                 </a:solidFill>
@@ -6053,9 +6024,9 @@
                 <a:ea typeface="DM Sans Bold" pitchFamily="34" charset="-122"/>
                 <a:cs typeface="DM Sans Bold" pitchFamily="34" charset="-120"/>
               </a:rPr>
-              <a:t>ÉCART DE CANDIDATURES</a:t>
-            </a:r>
-            <a:endParaRPr lang="en-US" sz="750" dirty="0"/>
+              <a:t>TROIS PÉRIMÈTRES</a:t>
+            </a:r>
+            <a:endParaRPr lang="en-US" sz="700" dirty="0"/>
           </a:p>
         </p:txBody>
       </p:sp>
@@ -6067,8 +6038,8 @@
         </p:nvSpPr>
         <p:spPr>
           <a:xfrm>
-            <a:off x="5672138" y="1925241"/>
-            <a:ext cx="2971800" cy="304279"/>
+            <a:off x="5586413" y="1525191"/>
+            <a:ext cx="3114675" cy="263984"/>
           </a:xfrm>
           <a:prstGeom prst="rect">
             <a:avLst/>
@@ -6084,12 +6055,12 @@
           <a:p>
             <a:pPr algn="l" indent="0" marL="0">
               <a:lnSpc>
-                <a:spcPct val="113600"/>
+                <a:spcPct val="105600"/>
               </a:lnSpc>
               <a:buNone/>
             </a:pPr>
             <a:r>
-              <a:rPr lang="en-US" sz="750" b="1" dirty="0">
+              <a:rPr lang="en-US" sz="700" b="1" dirty="0">
                 <a:solidFill>
                   <a:srgbClr val="486581"/>
                 </a:solidFill>
@@ -6097,10 +6068,10 @@
                 <a:ea typeface="DM Sans Bold" pitchFamily="34" charset="-122"/>
                 <a:cs typeface="DM Sans Bold" pitchFamily="34" charset="-120"/>
               </a:rPr>
-              <a:t>3 393</a:t>
-            </a:r>
-            <a:r>
-              <a:rPr lang="en-US" sz="800" dirty="0">
+              <a:t>3 079 officielles</a:t>
+            </a:r>
+            <a:r>
+              <a:rPr lang="en-US" sz="750" dirty="0">
                 <a:solidFill>
                   <a:srgbClr val="486581"/>
                 </a:solidFill>
@@ -6108,10 +6079,10 @@
                 <a:ea typeface="DM Sans" pitchFamily="34" charset="-122"/>
                 <a:cs typeface="DM Sans" pitchFamily="34" charset="-120"/>
               </a:rPr>
-              <a:t> dans la somme corrigée contre </a:t>
-            </a:r>
-            <a:r>
-              <a:rPr lang="en-US" sz="750" b="1" dirty="0">
+              <a:t>, </a:t>
+            </a:r>
+            <a:r>
+              <a:rPr lang="en-US" sz="700" b="1" dirty="0">
                 <a:solidFill>
                   <a:srgbClr val="486581"/>
                 </a:solidFill>
@@ -6119,10 +6090,10 @@
                 <a:ea typeface="DM Sans Bold" pitchFamily="34" charset="-122"/>
                 <a:cs typeface="DM Sans Bold" pitchFamily="34" charset="-120"/>
               </a:rPr>
-              <a:t>3 015</a:t>
-            </a:r>
-            <a:r>
-              <a:rPr lang="en-US" sz="800" dirty="0">
+              <a:t>3 555 lignes PDF</a:t>
+            </a:r>
+            <a:r>
+              <a:rPr lang="en-US" sz="750" dirty="0">
                 <a:solidFill>
                   <a:srgbClr val="486581"/>
                 </a:solidFill>
@@ -6130,10 +6101,21 @@
                 <a:ea typeface="DM Sans" pitchFamily="34" charset="-122"/>
                 <a:cs typeface="DM Sans" pitchFamily="34" charset="-120"/>
               </a:rPr>
-              <a:t> dans certains </a:t>
-            </a:r>
-            <a:r>
-              <a:rPr lang="en-US" sz="800" dirty="0">
+              <a:t> et </a:t>
+            </a:r>
+            <a:r>
+              <a:rPr lang="en-US" sz="700" b="1" dirty="0">
+                <a:solidFill>
+                  <a:srgbClr val="486581"/>
+                </a:solidFill>
+                <a:latin typeface="DM Sans Bold" pitchFamily="34" charset="0"/>
+                <a:ea typeface="DM Sans Bold" pitchFamily="34" charset="-122"/>
+                <a:cs typeface="DM Sans Bold" pitchFamily="34" charset="-120"/>
+              </a:rPr>
+              <a:t>3 558 corrigées</a:t>
+            </a:r>
+            <a:r>
+              <a:rPr lang="en-US" sz="750" dirty="0">
                 <a:solidFill>
                   <a:srgbClr val="486581"/>
                 </a:solidFill>
@@ -6141,9 +6123,20 @@
                 <a:ea typeface="DM Sans" pitchFamily="34" charset="-122"/>
                 <a:cs typeface="DM Sans" pitchFamily="34" charset="-120"/>
               </a:rPr>
-              <a:t>éléments du site et du dataset.</a:t>
-            </a:r>
-            <a:endParaRPr lang="en-US" sz="750" dirty="0"/>
+              <a:t> : le dernier </a:t>
+            </a:r>
+            <a:r>
+              <a:rPr lang="en-US" sz="750" dirty="0">
+                <a:solidFill>
+                  <a:srgbClr val="486581"/>
+                </a:solidFill>
+                <a:latin typeface="DM Sans" pitchFamily="34" charset="0"/>
+                <a:ea typeface="DM Sans" pitchFamily="34" charset="-122"/>
+                <a:cs typeface="DM Sans" pitchFamily="34" charset="-120"/>
+              </a:rPr>
+              <a:t>total ajoute 3 ajournés hors PDF.</a:t>
+            </a:r>
+            <a:endParaRPr lang="en-US" sz="700" dirty="0"/>
           </a:p>
         </p:txBody>
       </p:sp>
@@ -6155,8 +6148,8 @@
         </p:nvSpPr>
         <p:spPr>
           <a:xfrm>
-            <a:off x="5179219" y="2436688"/>
-            <a:ext cx="385763" cy="486445"/>
+            <a:off x="5150644" y="1924906"/>
+            <a:ext cx="342900" cy="538851"/>
           </a:xfrm>
           <a:prstGeom prst="rect">
             <a:avLst/>
@@ -6174,7 +6167,7 @@
               <a:buNone/>
             </a:pPr>
             <a:r>
-              <a:rPr lang="en-US" sz="1500" dirty="0">
+              <a:rPr lang="en-US" sz="1400" dirty="0">
                 <a:solidFill>
                   <a:srgbClr val="D97706"/>
                 </a:solidFill>
@@ -6184,7 +6177,7 @@
               </a:rPr>
               <a:t>02</a:t>
             </a:r>
-            <a:endParaRPr lang="en-US" sz="1500" dirty="0"/>
+            <a:endParaRPr lang="en-US" sz="1400" dirty="0"/>
           </a:p>
         </p:txBody>
       </p:sp>
@@ -6196,8 +6189,8 @@
         </p:nvSpPr>
         <p:spPr>
           <a:xfrm>
-            <a:off x="5672138" y="2436688"/>
-            <a:ext cx="2971800" cy="139303"/>
+            <a:off x="5586413" y="1924906"/>
+            <a:ext cx="3114675" cy="114300"/>
           </a:xfrm>
           <a:prstGeom prst="rect">
             <a:avLst/>
@@ -6215,7 +6208,7 @@
               <a:buNone/>
             </a:pPr>
             <a:r>
-              <a:rPr lang="en-US" sz="750" b="1" spc="1" kern="0" dirty="0">
+              <a:rPr lang="en-US" sz="700" b="1" spc="1" kern="0" dirty="0">
                 <a:solidFill>
                   <a:srgbClr val="102A43"/>
                 </a:solidFill>
@@ -6223,9 +6216,9 @@
                 <a:ea typeface="DM Sans Bold" pitchFamily="34" charset="-122"/>
                 <a:cs typeface="DM Sans Bold" pitchFamily="34" charset="-120"/>
               </a:rPr>
-              <a:t>PROVENANCE INDIVIDUELLE</a:t>
-            </a:r>
-            <a:endParaRPr lang="en-US" sz="750" dirty="0"/>
+              <a:t>CAS S62</a:t>
+            </a:r>
+            <a:endParaRPr lang="en-US" sz="700" dirty="0"/>
           </a:p>
         </p:txBody>
       </p:sp>
@@ -6237,8 +6230,8 @@
         </p:nvSpPr>
         <p:spPr>
           <a:xfrm>
-            <a:off x="5672138" y="2618854"/>
-            <a:ext cx="2971800" cy="304279"/>
+            <a:off x="5586413" y="2067781"/>
+            <a:ext cx="3114675" cy="395976"/>
           </a:xfrm>
           <a:prstGeom prst="rect">
             <a:avLst/>
@@ -6254,12 +6247,12 @@
           <a:p>
             <a:pPr algn="l" indent="0" marL="0">
               <a:lnSpc>
-                <a:spcPct val="113600"/>
+                <a:spcPct val="105600"/>
               </a:lnSpc>
               <a:buNone/>
             </a:pPr>
             <a:r>
-              <a:rPr lang="en-US" sz="800" dirty="0">
+              <a:rPr lang="en-US" sz="750" dirty="0">
                 <a:solidFill>
                   <a:srgbClr val="486581"/>
                 </a:solidFill>
@@ -6267,9 +6260,9 @@
                 <a:ea typeface="DM Sans" pitchFamily="34" charset="-122"/>
                 <a:cs typeface="DM Sans" pitchFamily="34" charset="-120"/>
               </a:rPr>
-              <a:t>Les fondateurs et décisions doivent rester reliés à la page PDF et à un niveau de confiance.</a:t>
-            </a:r>
-            <a:endParaRPr lang="en-US" sz="800" dirty="0"/>
+              <a:t>Mai 2024 compte 39 candidatures officielles mais 46 lignes PDF : 5 conversions, 2 retraits et 4 dossiers administratifs sans décision précisée.</a:t>
+            </a:r>
+            <a:endParaRPr lang="en-US" sz="750" dirty="0"/>
           </a:p>
         </p:txBody>
       </p:sp>
@@ -6281,8 +6274,8 @@
         </p:nvSpPr>
         <p:spPr>
           <a:xfrm>
-            <a:off x="5179219" y="3130302"/>
-            <a:ext cx="385763" cy="486445"/>
+            <a:off x="5150644" y="2599488"/>
+            <a:ext cx="342900" cy="538851"/>
           </a:xfrm>
           <a:prstGeom prst="rect">
             <a:avLst/>
@@ -6300,7 +6293,7 @@
               <a:buNone/>
             </a:pPr>
             <a:r>
-              <a:rPr lang="en-US" sz="1500" dirty="0">
+              <a:rPr lang="en-US" sz="1400" dirty="0">
                 <a:solidFill>
                   <a:srgbClr val="D97706"/>
                 </a:solidFill>
@@ -6310,7 +6303,7 @@
               </a:rPr>
               <a:t>03</a:t>
             </a:r>
-            <a:endParaRPr lang="en-US" sz="1500" dirty="0"/>
+            <a:endParaRPr lang="en-US" sz="1400" dirty="0"/>
           </a:p>
         </p:txBody>
       </p:sp>
@@ -6322,8 +6315,8 @@
         </p:nvSpPr>
         <p:spPr>
           <a:xfrm>
-            <a:off x="5672138" y="3130302"/>
-            <a:ext cx="2971800" cy="139303"/>
+            <a:off x="5586413" y="2599488"/>
+            <a:ext cx="3114675" cy="114300"/>
           </a:xfrm>
           <a:prstGeom prst="rect">
             <a:avLst/>
@@ -6341,7 +6334,7 @@
               <a:buNone/>
             </a:pPr>
             <a:r>
-              <a:rPr lang="en-US" sz="750" b="1" spc="1" kern="0" dirty="0">
+              <a:rPr lang="en-US" sz="700" b="1" spc="1" kern="0" dirty="0">
                 <a:solidFill>
                   <a:srgbClr val="102A43"/>
                 </a:solidFill>
@@ -6349,9 +6342,9 @@
                 <a:ea typeface="DM Sans Bold" pitchFamily="34" charset="-122"/>
                 <a:cs typeface="DM Sans Bold" pitchFamily="34" charset="-120"/>
               </a:rPr>
-              <a:t>GÉOGRAPHIE</a:t>
-            </a:r>
-            <a:endParaRPr lang="en-US" sz="750" dirty="0"/>
+              <a:t>PROVENANCE INDIVIDUELLE</a:t>
+            </a:r>
+            <a:endParaRPr lang="en-US" sz="700" dirty="0"/>
           </a:p>
         </p:txBody>
       </p:sp>
@@ -6363,8 +6356,8 @@
         </p:nvSpPr>
         <p:spPr>
           <a:xfrm>
-            <a:off x="5672138" y="3312468"/>
-            <a:ext cx="2971800" cy="304279"/>
+            <a:off x="5586413" y="2742363"/>
+            <a:ext cx="3114675" cy="395976"/>
           </a:xfrm>
           <a:prstGeom prst="rect">
             <a:avLst/>
@@ -6380,12 +6373,12 @@
           <a:p>
             <a:pPr algn="l" indent="0" marL="0">
               <a:lnSpc>
-                <a:spcPct val="113600"/>
+                <a:spcPct val="105600"/>
               </a:lnSpc>
               <a:buNone/>
             </a:pPr>
             <a:r>
-              <a:rPr lang="en-US" sz="800" dirty="0">
+              <a:rPr lang="en-US" sz="750" dirty="0">
                 <a:solidFill>
                   <a:srgbClr val="486581"/>
                 </a:solidFill>
@@ -6393,9 +6386,9 @@
                 <a:ea typeface="DM Sans" pitchFamily="34" charset="-122"/>
                 <a:cs typeface="DM Sans" pitchFamily="34" charset="-120"/>
               </a:rPr>
-              <a:t>Les rapports fournissent des agrégats régionaux, pas encore un géocodage individuel exhaustif.</a:t>
-            </a:r>
-            <a:endParaRPr lang="en-US" sz="800" dirty="0"/>
+              <a:t>Les 3 ajournés hors PDF — 2 en 03/2019 et 1 en 06/2019 — sont conservés séparément, car leurs noms ne sont pas publiés dans les éléments disponibles.</a:t>
+            </a:r>
+            <a:endParaRPr lang="en-US" sz="750" dirty="0"/>
           </a:p>
         </p:txBody>
       </p:sp>
@@ -6407,8 +6400,8 @@
         </p:nvSpPr>
         <p:spPr>
           <a:xfrm>
-            <a:off x="1343025" y="3809628"/>
-            <a:ext cx="7300913" cy="943198"/>
+            <a:off x="1285875" y="4261358"/>
+            <a:ext cx="7415213" cy="728551"/>
           </a:xfrm>
           <a:prstGeom prst="rect">
             <a:avLst/>
@@ -6418,10 +6411,6 @@
           </a:solidFill>
           <a:ln/>
         </p:spPr>
-        <p:txBody>
-          <a:bodyPr/>
-          <a:p/>
-        </p:txBody>
       </p:sp>
       <p:sp>
         <p:nvSpPr>
@@ -6431,8 +6420,8 @@
         </p:nvSpPr>
         <p:spPr>
           <a:xfrm>
-            <a:off x="1343025" y="3809628"/>
-            <a:ext cx="7300913" cy="57150"/>
+            <a:off x="1285875" y="4261358"/>
+            <a:ext cx="7415213" cy="50006"/>
           </a:xfrm>
           <a:prstGeom prst="rect">
             <a:avLst/>
@@ -6442,10 +6431,6 @@
           </a:solidFill>
           <a:ln/>
         </p:spPr>
-        <p:txBody>
-          <a:bodyPr/>
-          <a:p/>
-        </p:txBody>
       </p:sp>
       <p:sp>
         <p:nvSpPr>
@@ -6455,8 +6440,8 @@
         </p:nvSpPr>
         <p:spPr>
           <a:xfrm>
-            <a:off x="1514475" y="3968130"/>
-            <a:ext cx="5314950" cy="438894"/>
+            <a:off x="1428750" y="4397090"/>
+            <a:ext cx="5557838" cy="359978"/>
           </a:xfrm>
           <a:prstGeom prst="rect">
             <a:avLst/>
@@ -6472,12 +6457,12 @@
           <a:p>
             <a:pPr algn="l" indent="0" marL="0">
               <a:lnSpc>
-                <a:spcPct val="102400"/>
+                <a:spcPct val="96000"/>
               </a:lnSpc>
               <a:buNone/>
             </a:pPr>
             <a:r>
-              <a:rPr lang="en-US" sz="1250" dirty="0">
+              <a:rPr lang="en-US" sz="1100" dirty="0">
                 <a:solidFill>
                   <a:srgbClr val="F0F4F8"/>
                 </a:solidFill>
@@ -6487,7 +6472,7 @@
               </a:rPr>
               <a:t>La priorité suivante : publier un dictionnaire de données et résoudre chaque divergence par la source primaire.</a:t>
             </a:r>
-            <a:endParaRPr lang="en-US" sz="1250" dirty="0"/>
+            <a:endParaRPr lang="en-US" sz="1100" dirty="0"/>
           </a:p>
         </p:txBody>
       </p:sp>
@@ -6499,8 +6484,8 @@
         </p:nvSpPr>
         <p:spPr>
           <a:xfrm>
-            <a:off x="1514475" y="4457030"/>
-            <a:ext cx="5000625" cy="139973"/>
+            <a:off x="1428750" y="4792787"/>
+            <a:ext cx="5000625" cy="111398"/>
           </a:xfrm>
           <a:prstGeom prst="rect">
             <a:avLst/>
@@ -6516,12 +6501,12 @@
           <a:p>
             <a:pPr algn="l" indent="0" marL="0">
               <a:lnSpc>
-                <a:spcPct val="112000"/>
+                <a:spcPct val="104000"/>
               </a:lnSpc>
               <a:buNone/>
             </a:pPr>
             <a:r>
-              <a:rPr lang="en-US" sz="750" dirty="0">
+              <a:rPr lang="en-US" sz="600" dirty="0">
                 <a:solidFill>
                   <a:srgbClr val="C6D5E2"/>
                 </a:solidFill>
@@ -6531,7 +6516,7 @@
               </a:rPr>
               <a:t>Une base transparente ne masque pas ses écarts : elle les rend vérifiables, discutables et corrigibles.</a:t>
             </a:r>
-            <a:endParaRPr lang="en-US" sz="750" dirty="0"/>
+            <a:endParaRPr lang="en-US" sz="600" dirty="0"/>
           </a:p>
         </p:txBody>
       </p:sp>
@@ -6543,8 +6528,8 @@
         </p:nvSpPr>
         <p:spPr>
           <a:xfrm>
-            <a:off x="6829425" y="3976167"/>
-            <a:ext cx="1643063" cy="612800"/>
+            <a:off x="6986588" y="4479187"/>
+            <a:ext cx="1571625" cy="342900"/>
           </a:xfrm>
           <a:prstGeom prst="rect">
             <a:avLst/>
@@ -6560,12 +6545,12 @@
           <a:p>
             <a:pPr algn="r" indent="0" marL="0">
               <a:lnSpc>
-                <a:spcPct val="104000"/>
+                <a:spcPct val="96000"/>
               </a:lnSpc>
               <a:buNone/>
             </a:pPr>
             <a:r>
-              <a:rPr lang="en-US" sz="1150" dirty="0">
+              <a:rPr lang="en-US" sz="1050" dirty="0">
                 <a:solidFill>
                   <a:srgbClr val="D97706"/>
                 </a:solidFill>
@@ -6576,7 +6561,7 @@
               <a:t>Merci</a:t>
             </a:r>
             <a:r>
-              <a:rPr lang="en-US" sz="1150" dirty="0">
+              <a:rPr lang="en-US" sz="1050" dirty="0">
                 <a:solidFill>
                   <a:srgbClr val="D97706"/>
                 </a:solidFill>
@@ -6588,7 +6573,7 @@
 </a:t>
             </a:r>
             <a:r>
-              <a:rPr lang="en-US" sz="1150" dirty="0">
+              <a:rPr lang="en-US" sz="1050" dirty="0">
                 <a:solidFill>
                   <a:srgbClr val="D97706"/>
                 </a:solidFill>
@@ -6596,20 +6581,9 @@
                 <a:ea typeface="Libre Baskerville" pitchFamily="34" charset="-122"/>
                 <a:cs typeface="Libre Baskerville" pitchFamily="34" charset="-120"/>
               </a:rPr>
-              <a:t>Questions &amp; </a:t>
-            </a:r>
-            <a:r>
-              <a:rPr lang="en-US" sz="1150" dirty="0">
-                <a:solidFill>
-                  <a:srgbClr val="D97706"/>
-                </a:solidFill>
-                <a:latin typeface="Libre Baskerville" pitchFamily="34" charset="0"/>
-                <a:ea typeface="Libre Baskerville" pitchFamily="34" charset="-122"/>
-                <a:cs typeface="Libre Baskerville" pitchFamily="34" charset="-120"/>
-              </a:rPr>
-              <a:t>discussion</a:t>
-            </a:r>
-            <a:endParaRPr lang="en-US" sz="1150" dirty="0"/>
+              <a:t>Questions &amp; discussion</a:t>
+            </a:r>
+            <a:endParaRPr lang="en-US" sz="1050" dirty="0"/>
           </a:p>
         </p:txBody>
       </p:sp>
@@ -6621,8 +6595,8 @@
         </p:nvSpPr>
         <p:spPr>
           <a:xfrm>
-            <a:off x="1343025" y="4825603"/>
-            <a:ext cx="7300913" cy="103584"/>
+            <a:off x="1285875" y="5047059"/>
+            <a:ext cx="7415213" cy="82153"/>
           </a:xfrm>
           <a:prstGeom prst="rect">
             <a:avLst/>
@@ -6640,7 +6614,7 @@
               <a:buNone/>
             </a:pPr>
             <a:r>
-              <a:rPr lang="en-US" sz="550" dirty="0">
+              <a:rPr lang="en-US" sz="500" dirty="0">
                 <a:solidFill>
                   <a:srgbClr val="627D98"/>
                 </a:solidFill>
@@ -6648,9 +6622,9 @@
                 <a:ea typeface="DM Sans" pitchFamily="34" charset="-122"/>
                 <a:cs typeface="DM Sans" pitchFamily="34" charset="-120"/>
               </a:rPr>
-              <a:t>Sources : Startup Tunisia, rapports annuels 2019–2021, 85 sessions et corrections documentées dans le dépôt.</a:t>
-            </a:r>
-            <a:endParaRPr lang="en-US" sz="550" dirty="0"/>
+              <a:t>Sources : Startup Tunisia, comptes rendus PDF S0–S87, rapport annuel 2019–2021 et exports audités du dépôt. Les trois périmètres sont documentés séparément.</a:t>
+            </a:r>
+            <a:endParaRPr lang="en-US" sz="500" dirty="0"/>
           </a:p>
         </p:txBody>
       </p:sp>
@@ -6696,7 +6670,7 @@
         <p:spPr>
           <a:xfrm>
             <a:off x="0" y="0"/>
-            <a:ext cx="9144000" cy="5165154"/>
+            <a:ext cx="9144000" cy="5167945"/>
           </a:xfrm>
           <a:prstGeom prst="rect">
             <a:avLst/>
@@ -6712,7 +6686,7 @@
         <p:spPr>
           <a:xfrm>
             <a:off x="0" y="0"/>
-            <a:ext cx="800100" cy="5165154"/>
+            <a:ext cx="800100" cy="5167945"/>
           </a:xfrm>
           <a:prstGeom prst="rect">
             <a:avLst/>
@@ -6722,10 +6696,6 @@
           </a:solidFill>
           <a:ln/>
         </p:spPr>
-        <p:txBody>
-          <a:bodyPr/>
-          <a:p/>
-        </p:txBody>
       </p:sp>
       <p:sp>
         <p:nvSpPr>
@@ -6776,7 +6746,7 @@
         </p:nvSpPr>
         <p:spPr>
           <a:xfrm rot="10800000">
-            <a:off x="348258" y="2068227"/>
+            <a:off x="348258" y="2069623"/>
             <a:ext cx="103584" cy="1289447"/>
           </a:xfrm>
           <a:prstGeom prst="rect">
@@ -6817,7 +6787,7 @@
         </p:nvSpPr>
         <p:spPr>
           <a:xfrm>
-            <a:off x="344686" y="4840114"/>
+            <a:off x="344686" y="4842904"/>
             <a:ext cx="110728" cy="110728"/>
           </a:xfrm>
           <a:prstGeom prst="rect">
@@ -6995,10 +6965,6 @@
           </a:solidFill>
           <a:ln/>
         </p:spPr>
-        <p:txBody>
-          <a:bodyPr/>
-          <a:p/>
-        </p:txBody>
       </p:sp>
       <p:sp>
         <p:nvSpPr>
@@ -7019,10 +6985,6 @@
           </a:solidFill>
           <a:ln/>
         </p:spPr>
-        <p:txBody>
-          <a:bodyPr/>
-          <a:p/>
-        </p:txBody>
       </p:sp>
       <p:sp>
         <p:nvSpPr>
@@ -7169,10 +7131,6 @@
           </a:solidFill>
           <a:ln/>
         </p:spPr>
-        <p:txBody>
-          <a:bodyPr/>
-          <a:p/>
-        </p:txBody>
       </p:sp>
       <p:sp>
         <p:nvSpPr>
@@ -7193,10 +7151,6 @@
           </a:solidFill>
           <a:ln/>
         </p:spPr>
-        <p:txBody>
-          <a:bodyPr/>
-          <a:p/>
-        </p:txBody>
       </p:sp>
       <p:sp>
         <p:nvSpPr>
@@ -7333,7 +7287,7 @@
         <p:spPr>
           <a:xfrm>
             <a:off x="1385888" y="3668539"/>
-            <a:ext cx="7200900" cy="828675"/>
+            <a:ext cx="7200900" cy="831466"/>
           </a:xfrm>
           <a:prstGeom prst="rect">
             <a:avLst/>
@@ -7343,10 +7297,6 @@
           </a:solidFill>
           <a:ln/>
         </p:spPr>
-        <p:txBody>
-          <a:bodyPr/>
-          <a:p/>
-        </p:txBody>
       </p:sp>
       <p:sp>
         <p:nvSpPr>
@@ -7367,10 +7317,6 @@
           </a:solidFill>
           <a:ln/>
         </p:spPr>
-        <p:txBody>
-          <a:bodyPr/>
-          <a:p/>
-        </p:txBody>
       </p:sp>
       <p:sp>
         <p:nvSpPr>
@@ -7407,7 +7353,7 @@
                 <a:ea typeface="Libre Baskerville" pitchFamily="34" charset="-122"/>
                 <a:cs typeface="Libre Baskerville" pitchFamily="34" charset="-120"/>
               </a:rPr>
-              <a:t>85</a:t>
+              <a:t>88</a:t>
             </a:r>
             <a:endParaRPr lang="en-US" sz="1900" dirty="0"/>
           </a:p>
@@ -7462,8 +7408,8 @@
         </p:nvSpPr>
         <p:spPr>
           <a:xfrm>
-            <a:off x="3950494" y="3912877"/>
-            <a:ext cx="4071938" cy="339998"/>
+            <a:off x="3950494" y="3827878"/>
+            <a:ext cx="4071938" cy="509997"/>
           </a:xfrm>
           <a:prstGeom prst="rect">
             <a:avLst/>
@@ -7492,7 +7438,7 @@
                 <a:ea typeface="DM Sans" pitchFamily="34" charset="-122"/>
                 <a:cs typeface="DM Sans" pitchFamily="34" charset="-120"/>
               </a:rPr>
-              <a:t>Le corpus permet de suivre les volumes, les décisions, les corrections et les dynamiques territoriales sur 2019–2026.</a:t>
+              <a:t>Le corpus final couvre les sessions S0–S87 et permet de suivre les volumes, les décisions, les corrections et les dynamiques territoriales sur 2019–2026.</a:t>
             </a:r>
             <a:endParaRPr lang="en-US" sz="900" dirty="0"/>
           </a:p>
@@ -7533,7 +7479,7 @@
                 <a:ea typeface="DM Sans" pitchFamily="34" charset="-122"/>
                 <a:cs typeface="DM Sans" pitchFamily="34" charset="-120"/>
               </a:rPr>
-              <a:t>Sources : Startup Tunisia, About Startup Act et page officielle des résultats.</a:t>
+              <a:t>Sources : Startup Tunisia, About Startup Act, page officielle des résultats et 88 comptes-rendus PDF.</a:t>
             </a:r>
             <a:endParaRPr lang="en-US" sz="600" dirty="0"/>
           </a:p>
@@ -7607,10 +7553,6 @@
           </a:solidFill>
           <a:ln/>
         </p:spPr>
-        <p:txBody>
-          <a:bodyPr/>
-          <a:p/>
-        </p:txBody>
       </p:sp>
       <p:sp>
         <p:nvSpPr>
@@ -7910,7 +7852,7 @@
                 <a:ea typeface="Libre Baskerville Bold" pitchFamily="34" charset="-122"/>
                 <a:cs typeface="Libre Baskerville Bold" pitchFamily="34" charset="-120"/>
               </a:rPr>
-              <a:t>85 </a:t>
+              <a:t>88 </a:t>
             </a:r>
             <a:r>
               <a:rPr lang="en-US" sz="1700" b="1" dirty="0">
@@ -8602,7 +8544,7 @@
         <p:spPr>
           <a:xfrm>
             <a:off x="0" y="0"/>
-            <a:ext cx="9144000" cy="5512352"/>
+            <a:ext cx="9144000" cy="5183739"/>
           </a:xfrm>
           <a:prstGeom prst="rect">
             <a:avLst/>
@@ -8618,7 +8560,7 @@
         <p:spPr>
           <a:xfrm>
             <a:off x="0" y="0"/>
-            <a:ext cx="800100" cy="5512352"/>
+            <a:ext cx="800100" cy="5183739"/>
           </a:xfrm>
           <a:prstGeom prst="rect">
             <a:avLst/>
@@ -8628,10 +8570,6 @@
           </a:solidFill>
           <a:ln/>
         </p:spPr>
-        <p:txBody>
-          <a:bodyPr/>
-          <a:p/>
-        </p:txBody>
       </p:sp>
       <p:sp>
         <p:nvSpPr>
@@ -8682,7 +8620,7 @@
         </p:nvSpPr>
         <p:spPr>
           <a:xfrm rot="10800000">
-            <a:off x="348258" y="2456111"/>
+            <a:off x="348258" y="2291804"/>
             <a:ext cx="103584" cy="860822"/>
           </a:xfrm>
           <a:prstGeom prst="rect">
@@ -8723,7 +8661,7 @@
         </p:nvSpPr>
         <p:spPr>
           <a:xfrm>
-            <a:off x="332184" y="5187255"/>
+            <a:off x="332184" y="4858643"/>
             <a:ext cx="135731" cy="110728"/>
           </a:xfrm>
           <a:prstGeom prst="rect">
@@ -8937,8 +8875,8 @@
         </p:nvSpPr>
         <p:spPr>
           <a:xfrm>
-            <a:off x="1357313" y="2311952"/>
-            <a:ext cx="1746647" cy="1985963"/>
+            <a:off x="1357313" y="2240514"/>
+            <a:ext cx="1746647" cy="1914525"/>
           </a:xfrm>
           <a:prstGeom prst="rect">
             <a:avLst/>
@@ -8948,10 +8886,6 @@
           </a:solidFill>
           <a:ln/>
         </p:spPr>
-        <p:txBody>
-          <a:bodyPr/>
-          <a:p/>
-        </p:txBody>
       </p:sp>
       <p:sp>
         <p:nvSpPr>
@@ -8961,7 +8895,7 @@
         </p:nvSpPr>
         <p:spPr>
           <a:xfrm>
-            <a:off x="1357313" y="2311952"/>
+            <a:off x="1357313" y="2240514"/>
             <a:ext cx="1746647" cy="57150"/>
           </a:xfrm>
           <a:prstGeom prst="rect">
@@ -8972,10 +8906,6 @@
           </a:solidFill>
           <a:ln/>
         </p:spPr>
-        <p:txBody>
-          <a:bodyPr/>
-          <a:p/>
-        </p:txBody>
       </p:sp>
       <p:sp>
         <p:nvSpPr>
@@ -8985,8 +8915,8 @@
         </p:nvSpPr>
         <p:spPr>
           <a:xfrm>
-            <a:off x="1485900" y="2454827"/>
-            <a:ext cx="1489472" cy="282178"/>
+            <a:off x="1457325" y="2369102"/>
+            <a:ext cx="1546622" cy="282178"/>
           </a:xfrm>
           <a:prstGeom prst="rect">
             <a:avLst/>
@@ -9026,8 +8956,8 @@
         </p:nvSpPr>
         <p:spPr>
           <a:xfrm>
-            <a:off x="1485900" y="2865593"/>
-            <a:ext cx="1489472" cy="160734"/>
+            <a:off x="1457325" y="2779868"/>
+            <a:ext cx="1546622" cy="160734"/>
           </a:xfrm>
           <a:prstGeom prst="rect">
             <a:avLst/>
@@ -9067,8 +8997,8 @@
         </p:nvSpPr>
         <p:spPr>
           <a:xfrm>
-            <a:off x="1485900" y="3112052"/>
-            <a:ext cx="1489472" cy="776883"/>
+            <a:off x="1457325" y="3026327"/>
+            <a:ext cx="1546622" cy="621506"/>
           </a:xfrm>
           <a:prstGeom prst="rect">
             <a:avLst/>
@@ -9097,7 +9027,7 @@
                 <a:ea typeface="DM Sans Bold" pitchFamily="34" charset="-122"/>
                 <a:cs typeface="DM Sans Bold" pitchFamily="34" charset="-120"/>
               </a:rPr>
-              <a:t>85 sessions</a:t>
+              <a:t>88 sessions</a:t>
             </a:r>
             <a:r>
               <a:rPr lang="en-US" sz="800" dirty="0">
@@ -9141,7 +9071,173 @@
                 <a:ea typeface="DM Sans" pitchFamily="34" charset="-122"/>
                 <a:cs typeface="DM Sans" pitchFamily="34" charset="-120"/>
               </a:rPr>
-              <a:t>mesure le rythme du </a:t>
+              <a:t>mesure le rythme du dispositif.</a:t>
+            </a:r>
+            <a:endParaRPr lang="en-US" sz="750" dirty="0"/>
+          </a:p>
+        </p:txBody>
+      </p:sp>
+      <p:sp>
+        <p:nvSpPr>
+          <p:cNvPr id="16" name="Shape 13"/>
+          <p:cNvSpPr/>
+          <p:nvPr/>
+        </p:nvSpPr>
+        <p:spPr>
+          <a:xfrm>
+            <a:off x="3203972" y="2240514"/>
+            <a:ext cx="1746647" cy="1914525"/>
+          </a:xfrm>
+          <a:prstGeom prst="rect">
+            <a:avLst/>
+          </a:prstGeom>
+          <a:solidFill>
+            <a:srgbClr val="DBE9E8"/>
+          </a:solidFill>
+          <a:ln/>
+        </p:spPr>
+      </p:sp>
+      <p:sp>
+        <p:nvSpPr>
+          <p:cNvPr id="17" name="Shape 14"/>
+          <p:cNvSpPr/>
+          <p:nvPr/>
+        </p:nvSpPr>
+        <p:spPr>
+          <a:xfrm>
+            <a:off x="3203972" y="2240514"/>
+            <a:ext cx="1746647" cy="57150"/>
+          </a:xfrm>
+          <a:prstGeom prst="rect">
+            <a:avLst/>
+          </a:prstGeom>
+          <a:solidFill>
+            <a:srgbClr val="2D7D7B"/>
+          </a:solidFill>
+          <a:ln/>
+        </p:spPr>
+      </p:sp>
+      <p:sp>
+        <p:nvSpPr>
+          <p:cNvPr id="18" name="Text 15"/>
+          <p:cNvSpPr/>
+          <p:nvPr/>
+        </p:nvSpPr>
+        <p:spPr>
+          <a:xfrm>
+            <a:off x="3303984" y="2369102"/>
+            <a:ext cx="1546622" cy="282178"/>
+          </a:xfrm>
+          <a:prstGeom prst="rect">
+            <a:avLst/>
+          </a:prstGeom>
+          <a:noFill/>
+          <a:ln/>
+        </p:spPr>
+        <p:txBody>
+          <a:bodyPr wrap="square" lIns="0" tIns="0" rIns="0" bIns="0" rtlCol="0" anchor="t">
+            <a:spAutoFit/>
+          </a:bodyPr>
+          <a:lstStyle/>
+          <a:p>
+            <a:pPr algn="l" indent="0" marL="0">
+              <a:buNone/>
+            </a:pPr>
+            <a:r>
+              <a:rPr lang="en-US" sz="1700" dirty="0">
+                <a:solidFill>
+                  <a:srgbClr val="2D7D7B"/>
+                </a:solidFill>
+                <a:latin typeface="Libre Baskerville" pitchFamily="34" charset="0"/>
+                <a:ea typeface="Libre Baskerville" pitchFamily="34" charset="-122"/>
+                <a:cs typeface="Libre Baskerville" pitchFamily="34" charset="-120"/>
+              </a:rPr>
+              <a:t>02</a:t>
+            </a:r>
+            <a:endParaRPr lang="en-US" sz="1700" dirty="0"/>
+          </a:p>
+        </p:txBody>
+      </p:sp>
+      <p:sp>
+        <p:nvSpPr>
+          <p:cNvPr id="19" name="Text 16"/>
+          <p:cNvSpPr/>
+          <p:nvPr/>
+        </p:nvSpPr>
+        <p:spPr>
+          <a:xfrm>
+            <a:off x="3303984" y="2779868"/>
+            <a:ext cx="1546622" cy="160734"/>
+          </a:xfrm>
+          <a:prstGeom prst="rect">
+            <a:avLst/>
+          </a:prstGeom>
+          <a:noFill/>
+          <a:ln/>
+        </p:spPr>
+        <p:txBody>
+          <a:bodyPr wrap="square" lIns="0" tIns="0" rIns="0" bIns="0" rtlCol="0" anchor="t">
+            <a:spAutoFit/>
+          </a:bodyPr>
+          <a:lstStyle/>
+          <a:p>
+            <a:pPr algn="l" indent="0" marL="0">
+              <a:buNone/>
+            </a:pPr>
+            <a:r>
+              <a:rPr lang="en-US" sz="850" b="1" spc="1" kern="0" dirty="0">
+                <a:solidFill>
+                  <a:srgbClr val="102A43"/>
+                </a:solidFill>
+                <a:latin typeface="DM Sans Bold" pitchFamily="34" charset="0"/>
+                <a:ea typeface="DM Sans Bold" pitchFamily="34" charset="-122"/>
+                <a:cs typeface="DM Sans Bold" pitchFamily="34" charset="-120"/>
+              </a:rPr>
+              <a:t>DÉCISIONS</a:t>
+            </a:r>
+            <a:endParaRPr lang="en-US" sz="850" dirty="0"/>
+          </a:p>
+        </p:txBody>
+      </p:sp>
+      <p:sp>
+        <p:nvSpPr>
+          <p:cNvPr id="20" name="Text 17"/>
+          <p:cNvSpPr/>
+          <p:nvPr/>
+        </p:nvSpPr>
+        <p:spPr>
+          <a:xfrm>
+            <a:off x="3303984" y="3026327"/>
+            <a:ext cx="1546622" cy="621506"/>
+          </a:xfrm>
+          <a:prstGeom prst="rect">
+            <a:avLst/>
+          </a:prstGeom>
+          <a:noFill/>
+          <a:ln/>
+        </p:spPr>
+        <p:txBody>
+          <a:bodyPr wrap="square" lIns="0" tIns="0" rIns="0" bIns="0" rtlCol="0" anchor="t">
+            <a:spAutoFit/>
+          </a:bodyPr>
+          <a:lstStyle/>
+          <a:p>
+            <a:pPr algn="l" indent="0" marL="0">
+              <a:lnSpc>
+                <a:spcPct val="116000"/>
+              </a:lnSpc>
+              <a:buNone/>
+            </a:pPr>
+            <a:r>
+              <a:rPr lang="en-US" sz="750" b="1" dirty="0">
+                <a:solidFill>
+                  <a:srgbClr val="102A43"/>
+                </a:solidFill>
+                <a:latin typeface="DM Sans Bold" pitchFamily="34" charset="0"/>
+                <a:ea typeface="DM Sans Bold" pitchFamily="34" charset="-122"/>
+                <a:cs typeface="DM Sans Bold" pitchFamily="34" charset="-120"/>
+              </a:rPr>
+              <a:t>3 555 lignes détaillées</a:t>
             </a:r>
             <a:r>
               <a:rPr lang="en-US" sz="800" dirty="0">
@@ -9152,7 +9248,40 @@
                 <a:ea typeface="DM Sans" pitchFamily="34" charset="-122"/>
                 <a:cs typeface="DM Sans" pitchFamily="34" charset="-120"/>
               </a:rPr>
-              <a:t>dispositif.</a:t>
+              <a:t> : </a:t>
+            </a:r>
+            <a:r>
+              <a:rPr lang="en-US" sz="800" dirty="0">
+                <a:solidFill>
+                  <a:srgbClr val="486581"/>
+                </a:solidFill>
+                <a:latin typeface="DM Sans" pitchFamily="34" charset="0"/>
+                <a:ea typeface="DM Sans" pitchFamily="34" charset="-122"/>
+                <a:cs typeface="DM Sans" pitchFamily="34" charset="-120"/>
+              </a:rPr>
+              <a:t>sociétés, fondateurs, secteurs </a:t>
+            </a:r>
+            <a:r>
+              <a:rPr lang="en-US" sz="800" dirty="0">
+                <a:solidFill>
+                  <a:srgbClr val="486581"/>
+                </a:solidFill>
+                <a:latin typeface="DM Sans" pitchFamily="34" charset="0"/>
+                <a:ea typeface="DM Sans" pitchFamily="34" charset="-122"/>
+                <a:cs typeface="DM Sans" pitchFamily="34" charset="-120"/>
+              </a:rPr>
+              <a:t>et résultats. L’unité détaillée </a:t>
+            </a:r>
+            <a:r>
+              <a:rPr lang="en-US" sz="800" dirty="0">
+                <a:solidFill>
+                  <a:srgbClr val="486581"/>
+                </a:solidFill>
+                <a:latin typeface="DM Sans" pitchFamily="34" charset="0"/>
+                <a:ea typeface="DM Sans" pitchFamily="34" charset="-122"/>
+                <a:cs typeface="DM Sans" pitchFamily="34" charset="-120"/>
+              </a:rPr>
+              <a:t>est la ligne PDF.</a:t>
             </a:r>
             <a:endParaRPr lang="en-US" sz="750" dirty="0"/>
           </a:p>
@@ -9160,62 +9289,54 @@
       </p:sp>
       <p:sp>
         <p:nvSpPr>
-          <p:cNvPr id="16" name="Shape 13"/>
-          <p:cNvSpPr/>
-          <p:nvPr/>
-        </p:nvSpPr>
-        <p:spPr>
-          <a:xfrm>
-            <a:off x="3203972" y="2311952"/>
-            <a:ext cx="1746647" cy="1985963"/>
+          <p:cNvPr id="21" name="Shape 18"/>
+          <p:cNvSpPr/>
+          <p:nvPr/>
+        </p:nvSpPr>
+        <p:spPr>
+          <a:xfrm>
+            <a:off x="5050631" y="2240514"/>
+            <a:ext cx="1746647" cy="1914525"/>
           </a:xfrm>
           <a:prstGeom prst="rect">
             <a:avLst/>
           </a:prstGeom>
           <a:solidFill>
-            <a:srgbClr val="DBE9E8"/>
+            <a:srgbClr val="E0E8EF"/>
           </a:solidFill>
           <a:ln/>
         </p:spPr>
-        <p:txBody>
-          <a:bodyPr/>
-          <a:p/>
-        </p:txBody>
-      </p:sp>
-      <p:sp>
-        <p:nvSpPr>
-          <p:cNvPr id="17" name="Shape 14"/>
-          <p:cNvSpPr/>
-          <p:nvPr/>
-        </p:nvSpPr>
-        <p:spPr>
-          <a:xfrm>
-            <a:off x="3203972" y="2311952"/>
+      </p:sp>
+      <p:sp>
+        <p:nvSpPr>
+          <p:cNvPr id="22" name="Shape 19"/>
+          <p:cNvSpPr/>
+          <p:nvPr/>
+        </p:nvSpPr>
+        <p:spPr>
+          <a:xfrm>
+            <a:off x="5050631" y="2240514"/>
             <a:ext cx="1746647" cy="57150"/>
           </a:xfrm>
           <a:prstGeom prst="rect">
             <a:avLst/>
           </a:prstGeom>
           <a:solidFill>
-            <a:srgbClr val="2D7D7B"/>
+            <a:srgbClr val="829AB1"/>
           </a:solidFill>
           <a:ln/>
         </p:spPr>
-        <p:txBody>
-          <a:bodyPr/>
-          <a:p/>
-        </p:txBody>
-      </p:sp>
-      <p:sp>
-        <p:nvSpPr>
-          <p:cNvPr id="18" name="Text 15"/>
-          <p:cNvSpPr/>
-          <p:nvPr/>
-        </p:nvSpPr>
-        <p:spPr>
-          <a:xfrm>
-            <a:off x="3332559" y="2454827"/>
-            <a:ext cx="1489472" cy="282178"/>
+      </p:sp>
+      <p:sp>
+        <p:nvSpPr>
+          <p:cNvPr id="23" name="Text 20"/>
+          <p:cNvSpPr/>
+          <p:nvPr/>
+        </p:nvSpPr>
+        <p:spPr>
+          <a:xfrm>
+            <a:off x="5150644" y="2369102"/>
+            <a:ext cx="1546622" cy="282178"/>
           </a:xfrm>
           <a:prstGeom prst="rect">
             <a:avLst/>
@@ -9235,13 +9356,13 @@
             <a:r>
               <a:rPr lang="en-US" sz="1700" dirty="0">
                 <a:solidFill>
-                  <a:srgbClr val="2D7D7B"/>
+                  <a:srgbClr val="627D98"/>
                 </a:solidFill>
                 <a:latin typeface="Libre Baskerville" pitchFamily="34" charset="0"/>
                 <a:ea typeface="Libre Baskerville" pitchFamily="34" charset="-122"/>
                 <a:cs typeface="Libre Baskerville" pitchFamily="34" charset="-120"/>
               </a:rPr>
-              <a:t>02</a:t>
+              <a:t>03</a:t>
             </a:r>
             <a:endParaRPr lang="en-US" sz="1700" dirty="0"/>
           </a:p>
@@ -9249,14 +9370,14 @@
       </p:sp>
       <p:sp>
         <p:nvSpPr>
-          <p:cNvPr id="19" name="Text 16"/>
-          <p:cNvSpPr/>
-          <p:nvPr/>
-        </p:nvSpPr>
-        <p:spPr>
-          <a:xfrm>
-            <a:off x="3332559" y="2865593"/>
-            <a:ext cx="1489472" cy="160734"/>
+          <p:cNvPr id="24" name="Text 21"/>
+          <p:cNvSpPr/>
+          <p:nvPr/>
+        </p:nvSpPr>
+        <p:spPr>
+          <a:xfrm>
+            <a:off x="5150644" y="2779868"/>
+            <a:ext cx="1546622" cy="160734"/>
           </a:xfrm>
           <a:prstGeom prst="rect">
             <a:avLst/>
@@ -9282,7 +9403,7 @@
                 <a:ea typeface="DM Sans Bold" pitchFamily="34" charset="-122"/>
                 <a:cs typeface="DM Sans Bold" pitchFamily="34" charset="-120"/>
               </a:rPr>
-              <a:t>DÉCISIONS</a:t>
+              <a:t>RAPPORTS</a:t>
             </a:r>
             <a:endParaRPr lang="en-US" sz="850" dirty="0"/>
           </a:p>
@@ -9290,14 +9411,14 @@
       </p:sp>
       <p:sp>
         <p:nvSpPr>
-          <p:cNvPr id="20" name="Text 17"/>
-          <p:cNvSpPr/>
-          <p:nvPr/>
-        </p:nvSpPr>
-        <p:spPr>
-          <a:xfrm>
-            <a:off x="3332559" y="3112052"/>
-            <a:ext cx="1489472" cy="621506"/>
+          <p:cNvPr id="25" name="Text 22"/>
+          <p:cNvSpPr/>
+          <p:nvPr/>
+        </p:nvSpPr>
+        <p:spPr>
+          <a:xfrm>
+            <a:off x="5150644" y="3026327"/>
+            <a:ext cx="1546622" cy="621506"/>
           </a:xfrm>
           <a:prstGeom prst="rect">
             <a:avLst/>
@@ -9326,8 +9447,163 @@
                 <a:ea typeface="DM Sans" pitchFamily="34" charset="-122"/>
                 <a:cs typeface="DM Sans" pitchFamily="34" charset="-120"/>
               </a:rPr>
-              <a:t>Lignes PDF, sociétés, </a:t>
-            </a:r>
+              <a:t>Rapports annuels 2019, 2020 et 2021 pour la géographie, l’internationalisation et les emplois.</a:t>
+            </a:r>
+            <a:endParaRPr lang="en-US" sz="800" dirty="0"/>
+          </a:p>
+        </p:txBody>
+      </p:sp>
+      <p:sp>
+        <p:nvSpPr>
+          <p:cNvPr id="26" name="Shape 23"/>
+          <p:cNvSpPr/>
+          <p:nvPr/>
+        </p:nvSpPr>
+        <p:spPr>
+          <a:xfrm>
+            <a:off x="6897291" y="2240514"/>
+            <a:ext cx="1746647" cy="1914525"/>
+          </a:xfrm>
+          <a:prstGeom prst="rect">
+            <a:avLst/>
+          </a:prstGeom>
+          <a:solidFill>
+            <a:srgbClr val="D9E2EC"/>
+          </a:solidFill>
+          <a:ln/>
+        </p:spPr>
+      </p:sp>
+      <p:sp>
+        <p:nvSpPr>
+          <p:cNvPr id="27" name="Shape 24"/>
+          <p:cNvSpPr/>
+          <p:nvPr/>
+        </p:nvSpPr>
+        <p:spPr>
+          <a:xfrm>
+            <a:off x="6897291" y="2240514"/>
+            <a:ext cx="1746647" cy="57150"/>
+          </a:xfrm>
+          <a:prstGeom prst="rect">
+            <a:avLst/>
+          </a:prstGeom>
+          <a:solidFill>
+            <a:srgbClr val="102A43"/>
+          </a:solidFill>
+          <a:ln/>
+        </p:spPr>
+      </p:sp>
+      <p:sp>
+        <p:nvSpPr>
+          <p:cNvPr id="28" name="Text 25"/>
+          <p:cNvSpPr/>
+          <p:nvPr/>
+        </p:nvSpPr>
+        <p:spPr>
+          <a:xfrm>
+            <a:off x="6997303" y="2369102"/>
+            <a:ext cx="1546622" cy="282178"/>
+          </a:xfrm>
+          <a:prstGeom prst="rect">
+            <a:avLst/>
+          </a:prstGeom>
+          <a:noFill/>
+          <a:ln/>
+        </p:spPr>
+        <p:txBody>
+          <a:bodyPr wrap="square" lIns="0" tIns="0" rIns="0" bIns="0" rtlCol="0" anchor="t">
+            <a:spAutoFit/>
+          </a:bodyPr>
+          <a:lstStyle/>
+          <a:p>
+            <a:pPr algn="l" indent="0" marL="0">
+              <a:buNone/>
+            </a:pPr>
+            <a:r>
+              <a:rPr lang="en-US" sz="1700" dirty="0">
+                <a:solidFill>
+                  <a:srgbClr val="102A43"/>
+                </a:solidFill>
+                <a:latin typeface="Libre Baskerville" pitchFamily="34" charset="0"/>
+                <a:ea typeface="Libre Baskerville" pitchFamily="34" charset="-122"/>
+                <a:cs typeface="Libre Baskerville" pitchFamily="34" charset="-120"/>
+              </a:rPr>
+              <a:t>04</a:t>
+            </a:r>
+            <a:endParaRPr lang="en-US" sz="1700" dirty="0"/>
+          </a:p>
+        </p:txBody>
+      </p:sp>
+      <p:sp>
+        <p:nvSpPr>
+          <p:cNvPr id="29" name="Text 26"/>
+          <p:cNvSpPr/>
+          <p:nvPr/>
+        </p:nvSpPr>
+        <p:spPr>
+          <a:xfrm>
+            <a:off x="6997303" y="2779868"/>
+            <a:ext cx="1546622" cy="160734"/>
+          </a:xfrm>
+          <a:prstGeom prst="rect">
+            <a:avLst/>
+          </a:prstGeom>
+          <a:noFill/>
+          <a:ln/>
+        </p:spPr>
+        <p:txBody>
+          <a:bodyPr wrap="square" lIns="0" tIns="0" rIns="0" bIns="0" rtlCol="0" anchor="t">
+            <a:spAutoFit/>
+          </a:bodyPr>
+          <a:lstStyle/>
+          <a:p>
+            <a:pPr algn="l" indent="0" marL="0">
+              <a:buNone/>
+            </a:pPr>
+            <a:r>
+              <a:rPr lang="en-US" sz="850" b="1" spc="1" kern="0" dirty="0">
+                <a:solidFill>
+                  <a:srgbClr val="102A43"/>
+                </a:solidFill>
+                <a:latin typeface="DM Sans Bold" pitchFamily="34" charset="0"/>
+                <a:ea typeface="DM Sans Bold" pitchFamily="34" charset="-122"/>
+                <a:cs typeface="DM Sans Bold" pitchFamily="34" charset="-120"/>
+              </a:rPr>
+              <a:t>AUDIT</a:t>
+            </a:r>
+            <a:endParaRPr lang="en-US" sz="850" dirty="0"/>
+          </a:p>
+        </p:txBody>
+      </p:sp>
+      <p:sp>
+        <p:nvSpPr>
+          <p:cNvPr id="30" name="Text 27"/>
+          <p:cNvSpPr/>
+          <p:nvPr/>
+        </p:nvSpPr>
+        <p:spPr>
+          <a:xfrm>
+            <a:off x="6997303" y="3026327"/>
+            <a:ext cx="1546622" cy="621506"/>
+          </a:xfrm>
+          <a:prstGeom prst="rect">
+            <a:avLst/>
+          </a:prstGeom>
+          <a:noFill/>
+          <a:ln/>
+        </p:spPr>
+        <p:txBody>
+          <a:bodyPr wrap="square" lIns="0" tIns="0" rIns="0" bIns="0" rtlCol="0" anchor="t">
+            <a:spAutoFit/>
+          </a:bodyPr>
+          <a:lstStyle/>
+          <a:p>
+            <a:pPr algn="l" indent="0" marL="0">
+              <a:lnSpc>
+                <a:spcPct val="116000"/>
+              </a:lnSpc>
+              <a:buNone/>
+            </a:pPr>
             <a:r>
               <a:rPr lang="en-US" sz="800" dirty="0">
                 <a:solidFill>
@@ -9337,10 +9613,81 @@
                 <a:ea typeface="DM Sans" pitchFamily="34" charset="-122"/>
                 <a:cs typeface="DM Sans" pitchFamily="34" charset="-120"/>
               </a:rPr>
-              <a:t>fondateurs, secteurs et </a:t>
-            </a:r>
-            <a:r>
-              <a:rPr lang="en-US" sz="800" dirty="0">
+              <a:t>Comparaison des tables, corrections, PDF et agrégats, avec conservation des écarts et limites.</a:t>
+            </a:r>
+            <a:endParaRPr lang="en-US" sz="800" dirty="0"/>
+          </a:p>
+        </p:txBody>
+      </p:sp>
+      <p:sp>
+        <p:nvSpPr>
+          <p:cNvPr id="31" name="Text 28"/>
+          <p:cNvSpPr/>
+          <p:nvPr/>
+        </p:nvSpPr>
+        <p:spPr>
+          <a:xfrm>
+            <a:off x="1357313" y="4397927"/>
+            <a:ext cx="2309775" cy="103584"/>
+          </a:xfrm>
+          <a:prstGeom prst="rect">
+            <a:avLst/>
+          </a:prstGeom>
+          <a:noFill/>
+          <a:ln/>
+        </p:spPr>
+        <p:txBody>
+          <a:bodyPr wrap="square" lIns="0" tIns="0" rIns="0" bIns="0" rtlCol="0" anchor="t">
+            <a:spAutoFit/>
+          </a:bodyPr>
+          <a:lstStyle/>
+          <a:p>
+            <a:pPr algn="l" indent="0" marL="0">
+              <a:buNone/>
+            </a:pPr>
+            <a:r>
+              <a:rPr lang="en-US" sz="550" b="1" spc="1" kern="0" dirty="0">
+                <a:solidFill>
+                  <a:srgbClr val="102A43"/>
+                </a:solidFill>
+                <a:latin typeface="DM Sans Bold" pitchFamily="34" charset="0"/>
+                <a:ea typeface="DM Sans Bold" pitchFamily="34" charset="-122"/>
+                <a:cs typeface="DM Sans Bold" pitchFamily="34" charset="-120"/>
+              </a:rPr>
+              <a:t>POPULATION PRINCIPALE</a:t>
+            </a:r>
+            <a:endParaRPr lang="en-US" sz="550" dirty="0"/>
+          </a:p>
+        </p:txBody>
+      </p:sp>
+      <p:sp>
+        <p:nvSpPr>
+          <p:cNvPr id="32" name="Text 29"/>
+          <p:cNvSpPr/>
+          <p:nvPr/>
+        </p:nvSpPr>
+        <p:spPr>
+          <a:xfrm>
+            <a:off x="1357313" y="4537230"/>
+            <a:ext cx="932259" cy="132159"/>
+          </a:xfrm>
+          <a:prstGeom prst="rect">
+            <a:avLst/>
+          </a:prstGeom>
+          <a:noFill/>
+          <a:ln/>
+        </p:spPr>
+        <p:txBody>
+          <a:bodyPr wrap="none" lIns="0" tIns="0" rIns="0" bIns="0" rtlCol="0" anchor="t">
+            <a:spAutoFit/>
+          </a:bodyPr>
+          <a:lstStyle/>
+          <a:p>
+            <a:pPr algn="l" indent="0" marL="0">
+              <a:buNone/>
+            </a:pPr>
+            <a:r>
+              <a:rPr lang="en-US" sz="750" dirty="0">
                 <a:solidFill>
                   <a:srgbClr val="486581"/>
                 </a:solidFill>
@@ -9348,10 +9695,81 @@
                 <a:ea typeface="DM Sans" pitchFamily="34" charset="-122"/>
                 <a:cs typeface="DM Sans" pitchFamily="34" charset="-120"/>
               </a:rPr>
-              <a:t>résultats. L’unité détaillée est </a:t>
-            </a:r>
-            <a:r>
-              <a:rPr lang="en-US" sz="800" dirty="0">
+              <a:t>88 sessions S0–S87</a:t>
+            </a:r>
+            <a:endParaRPr lang="en-US" sz="750" dirty="0"/>
+          </a:p>
+        </p:txBody>
+      </p:sp>
+      <p:sp>
+        <p:nvSpPr>
+          <p:cNvPr id="33" name="Text 30"/>
+          <p:cNvSpPr/>
+          <p:nvPr/>
+        </p:nvSpPr>
+        <p:spPr>
+          <a:xfrm>
+            <a:off x="3845682" y="4397927"/>
+            <a:ext cx="2309831" cy="103584"/>
+          </a:xfrm>
+          <a:prstGeom prst="rect">
+            <a:avLst/>
+          </a:prstGeom>
+          <a:noFill/>
+          <a:ln/>
+        </p:spPr>
+        <p:txBody>
+          <a:bodyPr wrap="square" lIns="0" tIns="0" rIns="0" bIns="0" rtlCol="0" anchor="t">
+            <a:spAutoFit/>
+          </a:bodyPr>
+          <a:lstStyle/>
+          <a:p>
+            <a:pPr algn="l" indent="0" marL="0">
+              <a:buNone/>
+            </a:pPr>
+            <a:r>
+              <a:rPr lang="en-US" sz="550" b="1" spc="1" kern="0" dirty="0">
+                <a:solidFill>
+                  <a:srgbClr val="102A43"/>
+                </a:solidFill>
+                <a:latin typeface="DM Sans Bold" pitchFamily="34" charset="0"/>
+                <a:ea typeface="DM Sans Bold" pitchFamily="34" charset="-122"/>
+                <a:cs typeface="DM Sans Bold" pitchFamily="34" charset="-120"/>
+              </a:rPr>
+              <a:t>INDICATEUR CENTRAL</a:t>
+            </a:r>
+            <a:endParaRPr lang="en-US" sz="550" dirty="0"/>
+          </a:p>
+        </p:txBody>
+      </p:sp>
+      <p:sp>
+        <p:nvSpPr>
+          <p:cNvPr id="34" name="Text 31"/>
+          <p:cNvSpPr/>
+          <p:nvPr/>
+        </p:nvSpPr>
+        <p:spPr>
+          <a:xfrm>
+            <a:off x="3845682" y="4537230"/>
+            <a:ext cx="1832372" cy="132159"/>
+          </a:xfrm>
+          <a:prstGeom prst="rect">
+            <a:avLst/>
+          </a:prstGeom>
+          <a:noFill/>
+          <a:ln/>
+        </p:spPr>
+        <p:txBody>
+          <a:bodyPr wrap="square" lIns="0" tIns="0" rIns="0" bIns="0" rtlCol="0" anchor="t">
+            <a:spAutoFit/>
+          </a:bodyPr>
+          <a:lstStyle/>
+          <a:p>
+            <a:pPr algn="l" indent="0" marL="0">
+              <a:buNone/>
+            </a:pPr>
+            <a:r>
+              <a:rPr lang="en-US" sz="750" dirty="0">
                 <a:solidFill>
                   <a:srgbClr val="486581"/>
                 </a:solidFill>
@@ -9359,10 +9777,40 @@
                 <a:ea typeface="DM Sans" pitchFamily="34" charset="-122"/>
                 <a:cs typeface="DM Sans" pitchFamily="34" charset="-120"/>
               </a:rPr>
-              <a:t>la </a:t>
-            </a:r>
-            <a:r>
-              <a:rPr lang="en-US" sz="750" b="1" dirty="0">
+              <a:t>1 356 Labels / 3 079 candidatures × 100</a:t>
+            </a:r>
+            <a:endParaRPr lang="en-US" sz="750" dirty="0"/>
+          </a:p>
+        </p:txBody>
+      </p:sp>
+      <p:sp>
+        <p:nvSpPr>
+          <p:cNvPr id="35" name="Text 32"/>
+          <p:cNvSpPr/>
+          <p:nvPr/>
+        </p:nvSpPr>
+        <p:spPr>
+          <a:xfrm>
+            <a:off x="6334106" y="4397927"/>
+            <a:ext cx="2309831" cy="103584"/>
+          </a:xfrm>
+          <a:prstGeom prst="rect">
+            <a:avLst/>
+          </a:prstGeom>
+          <a:noFill/>
+          <a:ln/>
+        </p:spPr>
+        <p:txBody>
+          <a:bodyPr wrap="square" lIns="0" tIns="0" rIns="0" bIns="0" rtlCol="0" anchor="t">
+            <a:spAutoFit/>
+          </a:bodyPr>
+          <a:lstStyle/>
+          <a:p>
+            <a:pPr algn="l" indent="0" marL="0">
+              <a:buNone/>
+            </a:pPr>
+            <a:r>
+              <a:rPr lang="en-US" sz="550" b="1" spc="1" kern="0" dirty="0">
                 <a:solidFill>
                   <a:srgbClr val="102A43"/>
                 </a:solidFill>
@@ -9370,10 +9818,40 @@
                 <a:ea typeface="DM Sans Bold" pitchFamily="34" charset="-122"/>
                 <a:cs typeface="DM Sans Bold" pitchFamily="34" charset="-120"/>
               </a:rPr>
-              <a:t>ligne de décision</a:t>
-            </a:r>
-            <a:r>
-              <a:rPr lang="en-US" sz="800" dirty="0">
+              <a:t>RÈGLE DE PRUDENCE</a:t>
+            </a:r>
+            <a:endParaRPr lang="en-US" sz="550" dirty="0"/>
+          </a:p>
+        </p:txBody>
+      </p:sp>
+      <p:sp>
+        <p:nvSpPr>
+          <p:cNvPr id="36" name="Text 33"/>
+          <p:cNvSpPr/>
+          <p:nvPr/>
+        </p:nvSpPr>
+        <p:spPr>
+          <a:xfrm>
+            <a:off x="6334106" y="4537230"/>
+            <a:ext cx="2039541" cy="132159"/>
+          </a:xfrm>
+          <a:prstGeom prst="rect">
+            <a:avLst/>
+          </a:prstGeom>
+          <a:noFill/>
+          <a:ln/>
+        </p:spPr>
+        <p:txBody>
+          <a:bodyPr wrap="square" lIns="0" tIns="0" rIns="0" bIns="0" rtlCol="0" anchor="t">
+            <a:spAutoFit/>
+          </a:bodyPr>
+          <a:lstStyle/>
+          <a:p>
+            <a:pPr algn="l" indent="0" marL="0">
+              <a:buNone/>
+            </a:pPr>
+            <a:r>
+              <a:rPr lang="en-US" sz="750" dirty="0">
                 <a:solidFill>
                   <a:srgbClr val="486581"/>
                 </a:solidFill>
@@ -9381,173 +9859,40 @@
                 <a:ea typeface="DM Sans" pitchFamily="34" charset="-122"/>
                 <a:cs typeface="DM Sans" pitchFamily="34" charset="-120"/>
               </a:rPr>
-              <a:t>.</a:t>
-            </a:r>
-            <a:endParaRPr lang="en-US" sz="800" dirty="0"/>
-          </a:p>
-        </p:txBody>
-      </p:sp>
-      <p:sp>
-        <p:nvSpPr>
-          <p:cNvPr id="21" name="Shape 18"/>
-          <p:cNvSpPr/>
-          <p:nvPr/>
-        </p:nvSpPr>
-        <p:spPr>
-          <a:xfrm>
-            <a:off x="5050631" y="2311952"/>
-            <a:ext cx="1746647" cy="1985963"/>
-          </a:xfrm>
-          <a:prstGeom prst="rect">
-            <a:avLst/>
-          </a:prstGeom>
-          <a:solidFill>
-            <a:srgbClr val="E0E8EF"/>
-          </a:solidFill>
-          <a:ln/>
-        </p:spPr>
-        <p:txBody>
-          <a:bodyPr/>
-          <a:p/>
-        </p:txBody>
-      </p:sp>
-      <p:sp>
-        <p:nvSpPr>
-          <p:cNvPr id="22" name="Shape 19"/>
-          <p:cNvSpPr/>
-          <p:nvPr/>
-        </p:nvSpPr>
-        <p:spPr>
-          <a:xfrm>
-            <a:off x="5050631" y="2311952"/>
-            <a:ext cx="1746647" cy="57150"/>
-          </a:xfrm>
-          <a:prstGeom prst="rect">
-            <a:avLst/>
-          </a:prstGeom>
-          <a:solidFill>
-            <a:srgbClr val="829AB1"/>
-          </a:solidFill>
-          <a:ln/>
-        </p:spPr>
-        <p:txBody>
-          <a:bodyPr/>
-          <a:p/>
-        </p:txBody>
-      </p:sp>
-      <p:sp>
-        <p:nvSpPr>
-          <p:cNvPr id="23" name="Text 20"/>
-          <p:cNvSpPr/>
-          <p:nvPr/>
-        </p:nvSpPr>
-        <p:spPr>
-          <a:xfrm>
-            <a:off x="5179219" y="2454827"/>
-            <a:ext cx="1489472" cy="282178"/>
-          </a:xfrm>
-          <a:prstGeom prst="rect">
-            <a:avLst/>
-          </a:prstGeom>
-          <a:noFill/>
-          <a:ln/>
-        </p:spPr>
-        <p:txBody>
-          <a:bodyPr wrap="square" lIns="0" tIns="0" rIns="0" bIns="0" rtlCol="0" anchor="t">
-            <a:spAutoFit/>
-          </a:bodyPr>
-          <a:lstStyle/>
-          <a:p>
-            <a:pPr algn="l" indent="0" marL="0">
-              <a:buNone/>
-            </a:pPr>
-            <a:r>
-              <a:rPr lang="en-US" sz="1700" dirty="0">
-                <a:solidFill>
-                  <a:srgbClr val="627D98"/>
-                </a:solidFill>
-                <a:latin typeface="Libre Baskerville" pitchFamily="34" charset="0"/>
-                <a:ea typeface="Libre Baskerville" pitchFamily="34" charset="-122"/>
-                <a:cs typeface="Libre Baskerville" pitchFamily="34" charset="-120"/>
-              </a:rPr>
-              <a:t>03</a:t>
-            </a:r>
-            <a:endParaRPr lang="en-US" sz="1700" dirty="0"/>
-          </a:p>
-        </p:txBody>
-      </p:sp>
-      <p:sp>
-        <p:nvSpPr>
-          <p:cNvPr id="24" name="Text 21"/>
-          <p:cNvSpPr/>
-          <p:nvPr/>
-        </p:nvSpPr>
-        <p:spPr>
-          <a:xfrm>
-            <a:off x="5179219" y="2865593"/>
-            <a:ext cx="1489472" cy="160734"/>
-          </a:xfrm>
-          <a:prstGeom prst="rect">
-            <a:avLst/>
-          </a:prstGeom>
-          <a:noFill/>
-          <a:ln/>
-        </p:spPr>
-        <p:txBody>
-          <a:bodyPr wrap="square" lIns="0" tIns="0" rIns="0" bIns="0" rtlCol="0" anchor="t">
-            <a:spAutoFit/>
-          </a:bodyPr>
-          <a:lstStyle/>
-          <a:p>
-            <a:pPr algn="l" indent="0" marL="0">
-              <a:buNone/>
-            </a:pPr>
-            <a:r>
-              <a:rPr lang="en-US" sz="850" b="1" spc="1" kern="0" dirty="0">
-                <a:solidFill>
-                  <a:srgbClr val="102A43"/>
-                </a:solidFill>
-                <a:latin typeface="DM Sans Bold" pitchFamily="34" charset="0"/>
-                <a:ea typeface="DM Sans Bold" pitchFamily="34" charset="-122"/>
-                <a:cs typeface="DM Sans Bold" pitchFamily="34" charset="-120"/>
-              </a:rPr>
-              <a:t>RAPPORTS</a:t>
-            </a:r>
-            <a:endParaRPr lang="en-US" sz="850" dirty="0"/>
-          </a:p>
-        </p:txBody>
-      </p:sp>
-      <p:sp>
-        <p:nvSpPr>
-          <p:cNvPr id="25" name="Text 22"/>
-          <p:cNvSpPr/>
-          <p:nvPr/>
-        </p:nvSpPr>
-        <p:spPr>
-          <a:xfrm>
-            <a:off x="5179219" y="3112052"/>
-            <a:ext cx="1489472" cy="621506"/>
-          </a:xfrm>
-          <a:prstGeom prst="rect">
-            <a:avLst/>
-          </a:prstGeom>
-          <a:noFill/>
-          <a:ln/>
-        </p:spPr>
-        <p:txBody>
-          <a:bodyPr wrap="square" lIns="0" tIns="0" rIns="0" bIns="0" rtlCol="0" anchor="t">
-            <a:spAutoFit/>
-          </a:bodyPr>
-          <a:lstStyle/>
-          <a:p>
-            <a:pPr algn="l" indent="0" marL="0">
-              <a:lnSpc>
-                <a:spcPct val="116000"/>
-              </a:lnSpc>
-              <a:buNone/>
-            </a:pPr>
-            <a:r>
-              <a:rPr lang="en-US" sz="800" dirty="0">
+              <a:t>Les lignes détaillées ne remplacent jamais le</a:t>
+            </a:r>
+            <a:endParaRPr lang="en-US" sz="750" dirty="0"/>
+          </a:p>
+        </p:txBody>
+      </p:sp>
+      <p:sp>
+        <p:nvSpPr>
+          <p:cNvPr id="37" name="Text 34"/>
+          <p:cNvSpPr/>
+          <p:nvPr/>
+        </p:nvSpPr>
+        <p:spPr>
+          <a:xfrm>
+            <a:off x="6334106" y="4669389"/>
+            <a:ext cx="796528" cy="132159"/>
+          </a:xfrm>
+          <a:prstGeom prst="rect">
+            <a:avLst/>
+          </a:prstGeom>
+          <a:noFill/>
+          <a:ln/>
+        </p:spPr>
+        <p:txBody>
+          <a:bodyPr wrap="none" lIns="0" tIns="0" rIns="0" bIns="0" rtlCol="0" anchor="t">
+            <a:spAutoFit/>
+          </a:bodyPr>
+          <a:lstStyle/>
+          <a:p>
+            <a:pPr algn="l" indent="0" marL="0">
+              <a:buNone/>
+            </a:pPr>
+            <a:r>
+              <a:rPr lang="en-US" sz="750" dirty="0">
                 <a:solidFill>
                   <a:srgbClr val="486581"/>
                 </a:solidFill>
@@ -9555,263 +9900,7 @@
                 <a:ea typeface="DM Sans" pitchFamily="34" charset="-122"/>
                 <a:cs typeface="DM Sans" pitchFamily="34" charset="-120"/>
               </a:rPr>
-              <a:t>Rapports annuels 2019, 2020 et 2021 pour la géographie, l’internationalisation et les emplois.</a:t>
-            </a:r>
-            <a:endParaRPr lang="en-US" sz="800" dirty="0"/>
-          </a:p>
-        </p:txBody>
-      </p:sp>
-      <p:sp>
-        <p:nvSpPr>
-          <p:cNvPr id="26" name="Shape 23"/>
-          <p:cNvSpPr/>
-          <p:nvPr/>
-        </p:nvSpPr>
-        <p:spPr>
-          <a:xfrm>
-            <a:off x="6897291" y="2311952"/>
-            <a:ext cx="1746647" cy="1985963"/>
-          </a:xfrm>
-          <a:prstGeom prst="rect">
-            <a:avLst/>
-          </a:prstGeom>
-          <a:solidFill>
-            <a:srgbClr val="D9E2EC"/>
-          </a:solidFill>
-          <a:ln/>
-        </p:spPr>
-        <p:txBody>
-          <a:bodyPr/>
-          <a:p/>
-        </p:txBody>
-      </p:sp>
-      <p:sp>
-        <p:nvSpPr>
-          <p:cNvPr id="27" name="Shape 24"/>
-          <p:cNvSpPr/>
-          <p:nvPr/>
-        </p:nvSpPr>
-        <p:spPr>
-          <a:xfrm>
-            <a:off x="6897291" y="2311952"/>
-            <a:ext cx="1746647" cy="57150"/>
-          </a:xfrm>
-          <a:prstGeom prst="rect">
-            <a:avLst/>
-          </a:prstGeom>
-          <a:solidFill>
-            <a:srgbClr val="102A43"/>
-          </a:solidFill>
-          <a:ln/>
-        </p:spPr>
-        <p:txBody>
-          <a:bodyPr/>
-          <a:p/>
-        </p:txBody>
-      </p:sp>
-      <p:sp>
-        <p:nvSpPr>
-          <p:cNvPr id="28" name="Text 25"/>
-          <p:cNvSpPr/>
-          <p:nvPr/>
-        </p:nvSpPr>
-        <p:spPr>
-          <a:xfrm>
-            <a:off x="7025878" y="2454827"/>
-            <a:ext cx="1489472" cy="282178"/>
-          </a:xfrm>
-          <a:prstGeom prst="rect">
-            <a:avLst/>
-          </a:prstGeom>
-          <a:noFill/>
-          <a:ln/>
-        </p:spPr>
-        <p:txBody>
-          <a:bodyPr wrap="square" lIns="0" tIns="0" rIns="0" bIns="0" rtlCol="0" anchor="t">
-            <a:spAutoFit/>
-          </a:bodyPr>
-          <a:lstStyle/>
-          <a:p>
-            <a:pPr algn="l" indent="0" marL="0">
-              <a:buNone/>
-            </a:pPr>
-            <a:r>
-              <a:rPr lang="en-US" sz="1700" dirty="0">
-                <a:solidFill>
-                  <a:srgbClr val="102A43"/>
-                </a:solidFill>
-                <a:latin typeface="Libre Baskerville" pitchFamily="34" charset="0"/>
-                <a:ea typeface="Libre Baskerville" pitchFamily="34" charset="-122"/>
-                <a:cs typeface="Libre Baskerville" pitchFamily="34" charset="-120"/>
-              </a:rPr>
-              <a:t>04</a:t>
-            </a:r>
-            <a:endParaRPr lang="en-US" sz="1700" dirty="0"/>
-          </a:p>
-        </p:txBody>
-      </p:sp>
-      <p:sp>
-        <p:nvSpPr>
-          <p:cNvPr id="29" name="Text 26"/>
-          <p:cNvSpPr/>
-          <p:nvPr/>
-        </p:nvSpPr>
-        <p:spPr>
-          <a:xfrm>
-            <a:off x="7025878" y="2865593"/>
-            <a:ext cx="1489472" cy="160734"/>
-          </a:xfrm>
-          <a:prstGeom prst="rect">
-            <a:avLst/>
-          </a:prstGeom>
-          <a:noFill/>
-          <a:ln/>
-        </p:spPr>
-        <p:txBody>
-          <a:bodyPr wrap="square" lIns="0" tIns="0" rIns="0" bIns="0" rtlCol="0" anchor="t">
-            <a:spAutoFit/>
-          </a:bodyPr>
-          <a:lstStyle/>
-          <a:p>
-            <a:pPr algn="l" indent="0" marL="0">
-              <a:buNone/>
-            </a:pPr>
-            <a:r>
-              <a:rPr lang="en-US" sz="850" b="1" spc="1" kern="0" dirty="0">
-                <a:solidFill>
-                  <a:srgbClr val="102A43"/>
-                </a:solidFill>
-                <a:latin typeface="DM Sans Bold" pitchFamily="34" charset="0"/>
-                <a:ea typeface="DM Sans Bold" pitchFamily="34" charset="-122"/>
-                <a:cs typeface="DM Sans Bold" pitchFamily="34" charset="-120"/>
-              </a:rPr>
-              <a:t>AUDIT</a:t>
-            </a:r>
-            <a:endParaRPr lang="en-US" sz="850" dirty="0"/>
-          </a:p>
-        </p:txBody>
-      </p:sp>
-      <p:sp>
-        <p:nvSpPr>
-          <p:cNvPr id="30" name="Text 27"/>
-          <p:cNvSpPr/>
-          <p:nvPr/>
-        </p:nvSpPr>
-        <p:spPr>
-          <a:xfrm>
-            <a:off x="7025878" y="3112052"/>
-            <a:ext cx="1489472" cy="621506"/>
-          </a:xfrm>
-          <a:prstGeom prst="rect">
-            <a:avLst/>
-          </a:prstGeom>
-          <a:noFill/>
-          <a:ln/>
-        </p:spPr>
-        <p:txBody>
-          <a:bodyPr wrap="square" lIns="0" tIns="0" rIns="0" bIns="0" rtlCol="0" anchor="t">
-            <a:spAutoFit/>
-          </a:bodyPr>
-          <a:lstStyle/>
-          <a:p>
-            <a:pPr algn="l" indent="0" marL="0">
-              <a:lnSpc>
-                <a:spcPct val="116000"/>
-              </a:lnSpc>
-              <a:buNone/>
-            </a:pPr>
-            <a:r>
-              <a:rPr lang="en-US" sz="800" dirty="0">
-                <a:solidFill>
-                  <a:srgbClr val="486581"/>
-                </a:solidFill>
-                <a:latin typeface="DM Sans" pitchFamily="34" charset="0"/>
-                <a:ea typeface="DM Sans" pitchFamily="34" charset="-122"/>
-                <a:cs typeface="DM Sans" pitchFamily="34" charset="-120"/>
-              </a:rPr>
-              <a:t>Comparaison des tables initiales, corrections, PDF et agrégats, avec conservation des écarts et limites.</a:t>
-            </a:r>
-            <a:endParaRPr lang="en-US" sz="800" dirty="0"/>
-          </a:p>
-        </p:txBody>
-      </p:sp>
-      <p:sp>
-        <p:nvSpPr>
-          <p:cNvPr id="31" name="Text 28"/>
-          <p:cNvSpPr/>
-          <p:nvPr/>
-        </p:nvSpPr>
-        <p:spPr>
-          <a:xfrm>
-            <a:off x="1357313" y="4612239"/>
-            <a:ext cx="2309775" cy="103584"/>
-          </a:xfrm>
-          <a:prstGeom prst="rect">
-            <a:avLst/>
-          </a:prstGeom>
-          <a:noFill/>
-          <a:ln/>
-        </p:spPr>
-        <p:txBody>
-          <a:bodyPr wrap="square" lIns="0" tIns="0" rIns="0" bIns="0" rtlCol="0" anchor="t">
-            <a:spAutoFit/>
-          </a:bodyPr>
-          <a:lstStyle/>
-          <a:p>
-            <a:pPr algn="l" indent="0" marL="0">
-              <a:buNone/>
-            </a:pPr>
-            <a:r>
-              <a:rPr lang="en-US" sz="550" b="1" spc="1" kern="0" dirty="0">
-                <a:solidFill>
-                  <a:srgbClr val="102A43"/>
-                </a:solidFill>
-                <a:latin typeface="DM Sans Bold" pitchFamily="34" charset="0"/>
-                <a:ea typeface="DM Sans Bold" pitchFamily="34" charset="-122"/>
-                <a:cs typeface="DM Sans Bold" pitchFamily="34" charset="-120"/>
-              </a:rPr>
-              <a:t>POPULATION PRINCIPALE</a:t>
-            </a:r>
-            <a:endParaRPr lang="en-US" sz="550" dirty="0"/>
-          </a:p>
-        </p:txBody>
-      </p:sp>
-      <p:sp>
-        <p:nvSpPr>
-          <p:cNvPr id="32" name="Text 29"/>
-          <p:cNvSpPr/>
-          <p:nvPr/>
-        </p:nvSpPr>
-        <p:spPr>
-          <a:xfrm>
-            <a:off x="1357313" y="4751543"/>
-            <a:ext cx="1825228" cy="132159"/>
-          </a:xfrm>
-          <a:prstGeom prst="rect">
-            <a:avLst/>
-          </a:prstGeom>
-          <a:noFill/>
-          <a:ln/>
-        </p:spPr>
-        <p:txBody>
-          <a:bodyPr wrap="square" lIns="0" tIns="0" rIns="0" bIns="0" rtlCol="0" anchor="t">
-            <a:spAutoFit/>
-          </a:bodyPr>
-          <a:lstStyle/>
-          <a:p>
-            <a:pPr algn="l" indent="0" marL="0">
-              <a:buNone/>
-            </a:pPr>
-            <a:r>
-              <a:rPr lang="en-US" sz="750" dirty="0">
-                <a:solidFill>
-                  <a:srgbClr val="486581"/>
-                </a:solidFill>
-                <a:latin typeface="DM Sans" pitchFamily="34" charset="0"/>
-                <a:ea typeface="DM Sans" pitchFamily="34" charset="-122"/>
-                <a:cs typeface="DM Sans" pitchFamily="34" charset="-120"/>
-              </a:rPr>
-              <a:t>85 sessions de labellisation Startup Act</a:t>
+              <a:t>compteur officiel</a:t>
             </a:r>
             <a:endParaRPr lang="en-US" sz="750" dirty="0"/>
           </a:p>
@@ -9819,218 +9908,13 @@
       </p:sp>
       <p:sp>
         <p:nvSpPr>
-          <p:cNvPr id="33" name="Text 30"/>
-          <p:cNvSpPr/>
-          <p:nvPr/>
-        </p:nvSpPr>
-        <p:spPr>
-          <a:xfrm>
-            <a:off x="3845682" y="4612239"/>
-            <a:ext cx="2309831" cy="103584"/>
-          </a:xfrm>
-          <a:prstGeom prst="rect">
-            <a:avLst/>
-          </a:prstGeom>
-          <a:noFill/>
-          <a:ln/>
-        </p:spPr>
-        <p:txBody>
-          <a:bodyPr wrap="square" lIns="0" tIns="0" rIns="0" bIns="0" rtlCol="0" anchor="t">
-            <a:spAutoFit/>
-          </a:bodyPr>
-          <a:lstStyle/>
-          <a:p>
-            <a:pPr algn="l" indent="0" marL="0">
-              <a:buNone/>
-            </a:pPr>
-            <a:r>
-              <a:rPr lang="en-US" sz="550" b="1" spc="1" kern="0" dirty="0">
-                <a:solidFill>
-                  <a:srgbClr val="102A43"/>
-                </a:solidFill>
-                <a:latin typeface="DM Sans Bold" pitchFamily="34" charset="0"/>
-                <a:ea typeface="DM Sans Bold" pitchFamily="34" charset="-122"/>
-                <a:cs typeface="DM Sans Bold" pitchFamily="34" charset="-120"/>
-              </a:rPr>
-              <a:t>INDICATEUR CENTRAL</a:t>
-            </a:r>
-            <a:endParaRPr lang="en-US" sz="550" dirty="0"/>
-          </a:p>
-        </p:txBody>
-      </p:sp>
-      <p:sp>
-        <p:nvSpPr>
-          <p:cNvPr id="34" name="Text 31"/>
-          <p:cNvSpPr/>
-          <p:nvPr/>
-        </p:nvSpPr>
-        <p:spPr>
-          <a:xfrm>
-            <a:off x="3845682" y="4751543"/>
-            <a:ext cx="1271588" cy="132159"/>
-          </a:xfrm>
-          <a:prstGeom prst="rect">
-            <a:avLst/>
-          </a:prstGeom>
-          <a:noFill/>
-          <a:ln/>
-        </p:spPr>
-        <p:txBody>
-          <a:bodyPr wrap="none" lIns="0" tIns="0" rIns="0" bIns="0" rtlCol="0" anchor="t">
-            <a:spAutoFit/>
-          </a:bodyPr>
-          <a:lstStyle/>
-          <a:p>
-            <a:pPr algn="l" indent="0" marL="0">
-              <a:buNone/>
-            </a:pPr>
-            <a:r>
-              <a:rPr lang="en-US" sz="750" dirty="0">
-                <a:solidFill>
-                  <a:srgbClr val="486581"/>
-                </a:solidFill>
-                <a:latin typeface="DM Sans" pitchFamily="34" charset="0"/>
-                <a:ea typeface="DM Sans" pitchFamily="34" charset="-122"/>
-                <a:cs typeface="DM Sans" pitchFamily="34" charset="-120"/>
-              </a:rPr>
-              <a:t>Labels / candidatures × 100</a:t>
-            </a:r>
-            <a:endParaRPr lang="en-US" sz="750" dirty="0"/>
-          </a:p>
-        </p:txBody>
-      </p:sp>
-      <p:sp>
-        <p:nvSpPr>
-          <p:cNvPr id="35" name="Text 32"/>
-          <p:cNvSpPr/>
-          <p:nvPr/>
-        </p:nvSpPr>
-        <p:spPr>
-          <a:xfrm>
-            <a:off x="6334106" y="4612239"/>
-            <a:ext cx="2309831" cy="103584"/>
-          </a:xfrm>
-          <a:prstGeom prst="rect">
-            <a:avLst/>
-          </a:prstGeom>
-          <a:noFill/>
-          <a:ln/>
-        </p:spPr>
-        <p:txBody>
-          <a:bodyPr wrap="square" lIns="0" tIns="0" rIns="0" bIns="0" rtlCol="0" anchor="t">
-            <a:spAutoFit/>
-          </a:bodyPr>
-          <a:lstStyle/>
-          <a:p>
-            <a:pPr algn="l" indent="0" marL="0">
-              <a:buNone/>
-            </a:pPr>
-            <a:r>
-              <a:rPr lang="en-US" sz="550" b="1" spc="1" kern="0" dirty="0">
-                <a:solidFill>
-                  <a:srgbClr val="102A43"/>
-                </a:solidFill>
-                <a:latin typeface="DM Sans Bold" pitchFamily="34" charset="0"/>
-                <a:ea typeface="DM Sans Bold" pitchFamily="34" charset="-122"/>
-                <a:cs typeface="DM Sans Bold" pitchFamily="34" charset="-120"/>
-              </a:rPr>
-              <a:t>RÈGLE DE PRUDENCE</a:t>
-            </a:r>
-            <a:endParaRPr lang="en-US" sz="550" dirty="0"/>
-          </a:p>
-        </p:txBody>
-      </p:sp>
-      <p:sp>
-        <p:nvSpPr>
-          <p:cNvPr id="36" name="Text 33"/>
-          <p:cNvSpPr/>
-          <p:nvPr/>
-        </p:nvSpPr>
-        <p:spPr>
-          <a:xfrm>
-            <a:off x="6334106" y="4751543"/>
-            <a:ext cx="1882378" cy="132159"/>
-          </a:xfrm>
-          <a:prstGeom prst="rect">
-            <a:avLst/>
-          </a:prstGeom>
-          <a:noFill/>
-          <a:ln/>
-        </p:spPr>
-        <p:txBody>
-          <a:bodyPr wrap="square" lIns="0" tIns="0" rIns="0" bIns="0" rtlCol="0" anchor="t">
-            <a:spAutoFit/>
-          </a:bodyPr>
-          <a:lstStyle/>
-          <a:p>
-            <a:pPr algn="l" indent="0" marL="0">
-              <a:buNone/>
-            </a:pPr>
-            <a:r>
-              <a:rPr lang="en-US" sz="750" dirty="0">
-                <a:solidFill>
-                  <a:srgbClr val="486581"/>
-                </a:solidFill>
-                <a:latin typeface="DM Sans" pitchFamily="34" charset="0"/>
-                <a:ea typeface="DM Sans" pitchFamily="34" charset="-122"/>
-                <a:cs typeface="DM Sans" pitchFamily="34" charset="-120"/>
-              </a:rPr>
-              <a:t>Les données manquantes ne sont jamais</a:t>
-            </a:r>
-            <a:endParaRPr lang="en-US" sz="750" dirty="0"/>
-          </a:p>
-        </p:txBody>
-      </p:sp>
-      <p:sp>
-        <p:nvSpPr>
-          <p:cNvPr id="37" name="Text 34"/>
-          <p:cNvSpPr/>
-          <p:nvPr/>
-        </p:nvSpPr>
-        <p:spPr>
-          <a:xfrm>
-            <a:off x="6334106" y="4883702"/>
-            <a:ext cx="450056" cy="132159"/>
-          </a:xfrm>
-          <a:prstGeom prst="rect">
-            <a:avLst/>
-          </a:prstGeom>
-          <a:noFill/>
-          <a:ln/>
-        </p:spPr>
-        <p:txBody>
-          <a:bodyPr wrap="none" lIns="0" tIns="0" rIns="0" bIns="0" rtlCol="0" anchor="t">
-            <a:spAutoFit/>
-          </a:bodyPr>
-          <a:lstStyle/>
-          <a:p>
-            <a:pPr algn="l" indent="0" marL="0">
-              <a:buNone/>
-            </a:pPr>
-            <a:r>
-              <a:rPr lang="en-US" sz="750" dirty="0">
-                <a:solidFill>
-                  <a:srgbClr val="486581"/>
-                </a:solidFill>
-                <a:latin typeface="DM Sans" pitchFamily="34" charset="0"/>
-                <a:ea typeface="DM Sans" pitchFamily="34" charset="-122"/>
-                <a:cs typeface="DM Sans" pitchFamily="34" charset="-120"/>
-              </a:rPr>
-              <a:t>inventées</a:t>
-            </a:r>
-            <a:endParaRPr lang="en-US" sz="750" dirty="0"/>
-          </a:p>
-        </p:txBody>
-      </p:sp>
-      <p:sp>
-        <p:nvSpPr>
           <p:cNvPr id="38" name="Text 35"/>
           <p:cNvSpPr/>
           <p:nvPr/>
         </p:nvSpPr>
         <p:spPr>
           <a:xfrm>
-            <a:off x="1357313" y="5151593"/>
+            <a:off x="1357313" y="4937280"/>
             <a:ext cx="7286625" cy="103584"/>
           </a:xfrm>
           <a:prstGeom prst="rect">
@@ -10105,7 +9989,7 @@
         <p:spPr>
           <a:xfrm>
             <a:off x="0" y="0"/>
-            <a:ext cx="9144000" cy="5143500"/>
+            <a:ext cx="9144000" cy="5337107"/>
           </a:xfrm>
           <a:prstGeom prst="rect">
             <a:avLst/>
@@ -10121,7 +10005,7 @@
         <p:spPr>
           <a:xfrm>
             <a:off x="0" y="0"/>
-            <a:ext cx="800100" cy="5143500"/>
+            <a:ext cx="800100" cy="5337107"/>
           </a:xfrm>
           <a:prstGeom prst="rect">
             <a:avLst/>
@@ -10131,10 +10015,6 @@
           </a:solidFill>
           <a:ln/>
         </p:spPr>
-        <p:txBody>
-          <a:bodyPr/>
-          <a:p/>
-        </p:txBody>
       </p:sp>
       <p:sp>
         <p:nvSpPr>
@@ -10144,7 +10024,7 @@
         </p:nvSpPr>
         <p:spPr>
           <a:xfrm>
-            <a:off x="228600" y="142875"/>
+            <a:off x="228600" y="114300"/>
             <a:ext cx="342900" cy="342900"/>
           </a:xfrm>
           <a:prstGeom prst="rect">
@@ -10185,7 +10065,7 @@
         </p:nvSpPr>
         <p:spPr>
           <a:xfrm>
-            <a:off x="0" y="600075"/>
+            <a:off x="0" y="557213"/>
             <a:ext cx="800100" cy="207169"/>
           </a:xfrm>
           <a:prstGeom prst="rect">
@@ -10226,7 +10106,7 @@
         </p:nvSpPr>
         <p:spPr>
           <a:xfrm>
-            <a:off x="330398" y="921544"/>
+            <a:off x="330398" y="864394"/>
             <a:ext cx="139303" cy="110728"/>
           </a:xfrm>
           <a:prstGeom prst="rect">
@@ -10267,7 +10147,7 @@
         </p:nvSpPr>
         <p:spPr>
           <a:xfrm>
-            <a:off x="1228725" y="242888"/>
+            <a:off x="1085850" y="142875"/>
             <a:ext cx="5429250" cy="110728"/>
           </a:xfrm>
           <a:prstGeom prst="rect">
@@ -10308,7 +10188,7 @@
         </p:nvSpPr>
         <p:spPr>
           <a:xfrm>
-            <a:off x="1228725" y="446484"/>
+            <a:off x="1085850" y="346472"/>
             <a:ext cx="5429250" cy="657448"/>
           </a:xfrm>
           <a:prstGeom prst="rect">
@@ -10352,7 +10232,7 @@
         </p:nvSpPr>
         <p:spPr>
           <a:xfrm>
-            <a:off x="8001000" y="242888"/>
+            <a:off x="8143875" y="142875"/>
             <a:ext cx="714375" cy="689372"/>
           </a:xfrm>
           <a:prstGeom prst="rect">
@@ -10393,7 +10273,7 @@
         </p:nvSpPr>
         <p:spPr>
           <a:xfrm>
-            <a:off x="1228725" y="1429476"/>
+            <a:off x="1085850" y="1392864"/>
             <a:ext cx="1428750" cy="874384"/>
           </a:xfrm>
           <a:prstGeom prst="rect">
@@ -10437,8 +10317,8 @@
         </p:nvSpPr>
         <p:spPr>
           <a:xfrm>
-            <a:off x="2857500" y="1296814"/>
-            <a:ext cx="1400175" cy="178594"/>
+            <a:off x="2657475" y="1139651"/>
+            <a:ext cx="1510903" cy="178594"/>
           </a:xfrm>
           <a:prstGeom prst="rect">
             <a:avLst/>
@@ -10467,7 +10347,7 @@
                 <a:ea typeface="DM Sans" pitchFamily="34" charset="-122"/>
                 <a:cs typeface="DM Sans" pitchFamily="34" charset="-120"/>
               </a:rPr>
-              <a:t>sessions corrigées sur</a:t>
+              <a:t>sessions corrigées dans</a:t>
             </a:r>
             <a:endParaRPr lang="en-US" sz="1000" dirty="0"/>
           </a:p>
@@ -10481,8 +10361,8 @@
         </p:nvSpPr>
         <p:spPr>
           <a:xfrm>
-            <a:off x="2857500" y="1480040"/>
-            <a:ext cx="164306" cy="178594"/>
+            <a:off x="2657475" y="1322877"/>
+            <a:ext cx="1146572" cy="178594"/>
           </a:xfrm>
           <a:prstGeom prst="rect">
             <a:avLst/>
@@ -10511,7 +10391,7 @@
                 <a:ea typeface="DM Sans" pitchFamily="34" charset="-122"/>
                 <a:cs typeface="DM Sans" pitchFamily="34" charset="-120"/>
               </a:rPr>
-              <a:t>85</a:t>
+              <a:t>le socle historique</a:t>
             </a:r>
             <a:endParaRPr lang="en-US" sz="1000" dirty="0"/>
           </a:p>
@@ -10525,8 +10405,8 @@
         </p:nvSpPr>
         <p:spPr>
           <a:xfrm>
-            <a:off x="2857500" y="1713272"/>
-            <a:ext cx="1535906" cy="723305"/>
+            <a:off x="2657475" y="1556110"/>
+            <a:ext cx="1535906" cy="964406"/>
           </a:xfrm>
           <a:prstGeom prst="rect">
             <a:avLst/>
@@ -10555,7 +10435,7 @@
                 <a:ea typeface="DM Sans Bold" pitchFamily="34" charset="-122"/>
                 <a:cs typeface="DM Sans Bold" pitchFamily="34" charset="-120"/>
               </a:rPr>
-              <a:t>Une correction documentée, pas une estimation.</a:t>
+              <a:t>Trois PDF ajoutent S85–S87 au corpus final.</a:t>
             </a:r>
             <a:endParaRPr lang="en-US" sz="1250" dirty="0"/>
           </a:p>
@@ -10569,8 +10449,8 @@
         </p:nvSpPr>
         <p:spPr>
           <a:xfrm>
-            <a:off x="1228725" y="2586596"/>
-            <a:ext cx="3507581" cy="1453753"/>
+            <a:off x="1085850" y="2627672"/>
+            <a:ext cx="3650456" cy="1746647"/>
           </a:xfrm>
           <a:prstGeom prst="rect">
             <a:avLst/>
@@ -10580,10 +10460,6 @@
           </a:solidFill>
           <a:ln/>
         </p:spPr>
-        <p:txBody>
-          <a:bodyPr/>
-          <a:p/>
-        </p:txBody>
       </p:sp>
       <p:sp>
         <p:nvSpPr>
@@ -10593,8 +10469,8 @@
         </p:nvSpPr>
         <p:spPr>
           <a:xfrm>
-            <a:off x="1357313" y="2700896"/>
-            <a:ext cx="3250406" cy="132159"/>
+            <a:off x="1171575" y="2699110"/>
+            <a:ext cx="3479006" cy="132159"/>
           </a:xfrm>
           <a:prstGeom prst="rect">
             <a:avLst/>
@@ -10620,7 +10496,7 @@
                 <a:ea typeface="DM Sans Bold" pitchFamily="34" charset="-122"/>
                 <a:cs typeface="DM Sans Bold" pitchFamily="34" charset="-120"/>
               </a:rPr>
-              <a:t>TABLE INITIALE</a:t>
+              <a:t>ÉTUDE · LIGNES PDF + AJOURNÉS HORS PDF</a:t>
             </a:r>
             <a:endParaRPr lang="en-US" sz="700" dirty="0"/>
           </a:p>
@@ -10634,8 +10510,8 @@
         </p:nvSpPr>
         <p:spPr>
           <a:xfrm>
-            <a:off x="1357313" y="3100946"/>
-            <a:ext cx="364331" cy="160734"/>
+            <a:off x="1171575" y="3070585"/>
+            <a:ext cx="1178719" cy="160734"/>
           </a:xfrm>
           <a:prstGeom prst="rect">
             <a:avLst/>
@@ -10661,7 +10537,7 @@
                 <a:ea typeface="DM Sans" pitchFamily="34" charset="-122"/>
                 <a:cs typeface="DM Sans" pitchFamily="34" charset="-120"/>
               </a:rPr>
-              <a:t>Labels</a:t>
+              <a:t>Lignes PDF détaillées</a:t>
             </a:r>
             <a:endParaRPr lang="en-US" sz="900" dirty="0"/>
           </a:p>
@@ -10675,8 +10551,8 @@
         </p:nvSpPr>
         <p:spPr>
           <a:xfrm>
-            <a:off x="3807619" y="2933067"/>
-            <a:ext cx="800100" cy="371475"/>
+            <a:off x="3843338" y="2902707"/>
+            <a:ext cx="807244" cy="371475"/>
           </a:xfrm>
           <a:prstGeom prst="rect">
             <a:avLst/>
@@ -10702,7 +10578,7 @@
                 <a:ea typeface="Libre Baskerville Bold" pitchFamily="34" charset="-122"/>
                 <a:cs typeface="Libre Baskerville Bold" pitchFamily="34" charset="-120"/>
               </a:rPr>
-              <a:t>1 324</a:t>
+              <a:t>3 555</a:t>
             </a:r>
             <a:endParaRPr lang="en-US" sz="2100" dirty="0"/>
           </a:p>
@@ -10716,8 +10592,8 @@
         </p:nvSpPr>
         <p:spPr>
           <a:xfrm>
-            <a:off x="1357313" y="3651014"/>
-            <a:ext cx="510778" cy="160734"/>
+            <a:off x="1171575" y="3563503"/>
+            <a:ext cx="1028700" cy="160734"/>
           </a:xfrm>
           <a:prstGeom prst="rect">
             <a:avLst/>
@@ -10743,7 +10619,7 @@
                 <a:ea typeface="DM Sans" pitchFamily="34" charset="-122"/>
                 <a:cs typeface="DM Sans" pitchFamily="34" charset="-120"/>
               </a:rPr>
-              <a:t>Prélabels</a:t>
+              <a:t>Ajournés hors PDF</a:t>
             </a:r>
             <a:endParaRPr lang="en-US" sz="900" dirty="0"/>
           </a:p>
@@ -10757,8 +10633,8 @@
         </p:nvSpPr>
         <p:spPr>
           <a:xfrm>
-            <a:off x="4118372" y="3483136"/>
-            <a:ext cx="489347" cy="371475"/>
+            <a:off x="4289822" y="3395625"/>
+            <a:ext cx="360759" cy="371475"/>
           </a:xfrm>
           <a:prstGeom prst="rect">
             <a:avLst/>
@@ -10784,7 +10660,7 @@
                 <a:ea typeface="Libre Baskerville Bold" pitchFamily="34" charset="-122"/>
                 <a:cs typeface="Libre Baskerville Bold" pitchFamily="34" charset="-120"/>
               </a:rPr>
-              <a:t>617</a:t>
+              <a:t>+3</a:t>
             </a:r>
             <a:endParaRPr lang="en-US" sz="2100" dirty="0"/>
           </a:p>
@@ -10798,8 +10674,90 @@
         </p:nvSpPr>
         <p:spPr>
           <a:xfrm>
-            <a:off x="4736306" y="2586596"/>
-            <a:ext cx="471488" cy="1453753"/>
+            <a:off x="1171575" y="4056422"/>
+            <a:ext cx="1310878" cy="160734"/>
+          </a:xfrm>
+          <a:prstGeom prst="rect">
+            <a:avLst/>
+          </a:prstGeom>
+          <a:noFill/>
+          <a:ln/>
+        </p:spPr>
+        <p:txBody>
+          <a:bodyPr wrap="square" lIns="0" tIns="0" rIns="0" bIns="0" rtlCol="0" anchor="t">
+            <a:spAutoFit/>
+          </a:bodyPr>
+          <a:lstStyle/>
+          <a:p>
+            <a:pPr algn="l" indent="0" marL="0">
+              <a:buNone/>
+            </a:pPr>
+            <a:r>
+              <a:rPr lang="en-US" sz="900" dirty="0">
+                <a:solidFill>
+                  <a:srgbClr val="334E68"/>
+                </a:solidFill>
+                <a:latin typeface="DM Sans" pitchFamily="34" charset="0"/>
+                <a:ea typeface="DM Sans" pitchFamily="34" charset="-122"/>
+                <a:cs typeface="DM Sans" pitchFamily="34" charset="-120"/>
+              </a:rPr>
+              <a:t>Candidatures corrigées</a:t>
+            </a:r>
+            <a:endParaRPr lang="en-US" sz="900" dirty="0"/>
+          </a:p>
+        </p:txBody>
+      </p:sp>
+      <p:sp>
+        <p:nvSpPr>
+          <p:cNvPr id="21" name="Text 18"/>
+          <p:cNvSpPr/>
+          <p:nvPr/>
+        </p:nvSpPr>
+        <p:spPr>
+          <a:xfrm>
+            <a:off x="3832622" y="3888544"/>
+            <a:ext cx="817959" cy="371475"/>
+          </a:xfrm>
+          <a:prstGeom prst="rect">
+            <a:avLst/>
+          </a:prstGeom>
+          <a:noFill/>
+          <a:ln/>
+        </p:spPr>
+        <p:txBody>
+          <a:bodyPr wrap="none" lIns="0" tIns="0" rIns="0" bIns="0" rtlCol="0" anchor="t">
+            <a:spAutoFit/>
+          </a:bodyPr>
+          <a:lstStyle/>
+          <a:p>
+            <a:pPr algn="l" indent="0" marL="0">
+              <a:buNone/>
+            </a:pPr>
+            <a:r>
+              <a:rPr lang="en-US" sz="2100" b="1" dirty="0">
+                <a:solidFill>
+                  <a:srgbClr val="102A43"/>
+                </a:solidFill>
+                <a:latin typeface="Libre Baskerville Bold" pitchFamily="34" charset="0"/>
+                <a:ea typeface="Libre Baskerville Bold" pitchFamily="34" charset="-122"/>
+                <a:cs typeface="Libre Baskerville Bold" pitchFamily="34" charset="-120"/>
+              </a:rPr>
+              <a:t>3 558</a:t>
+            </a:r>
+            <a:endParaRPr lang="en-US" sz="2100" dirty="0"/>
+          </a:p>
+        </p:txBody>
+      </p:sp>
+      <p:sp>
+        <p:nvSpPr>
+          <p:cNvPr id="22" name="Text 19"/>
+          <p:cNvSpPr/>
+          <p:nvPr/>
+        </p:nvSpPr>
+        <p:spPr>
+          <a:xfrm>
+            <a:off x="4736306" y="2627672"/>
+            <a:ext cx="471488" cy="1746647"/>
           </a:xfrm>
           <a:prstGeom prst="rect">
             <a:avLst/>
@@ -10833,14 +10791,14 @@
       </p:sp>
       <p:sp>
         <p:nvSpPr>
-          <p:cNvPr id="21" name="Shape 18"/>
-          <p:cNvSpPr/>
-          <p:nvPr/>
-        </p:nvSpPr>
-        <p:spPr>
-          <a:xfrm>
-            <a:off x="5207794" y="2536589"/>
-            <a:ext cx="3507581" cy="1503759"/>
+          <p:cNvPr id="23" name="Shape 20"/>
+          <p:cNvSpPr/>
+          <p:nvPr/>
+        </p:nvSpPr>
+        <p:spPr>
+          <a:xfrm>
+            <a:off x="5207794" y="2577666"/>
+            <a:ext cx="3650456" cy="1796653"/>
           </a:xfrm>
           <a:prstGeom prst="rect">
             <a:avLst/>
@@ -10850,21 +10808,17 @@
           </a:solidFill>
           <a:ln/>
         </p:spPr>
-        <p:txBody>
-          <a:bodyPr/>
-          <a:p/>
-        </p:txBody>
-      </p:sp>
-      <p:sp>
-        <p:nvSpPr>
-          <p:cNvPr id="22" name="Shape 19"/>
-          <p:cNvSpPr/>
-          <p:nvPr/>
-        </p:nvSpPr>
-        <p:spPr>
-          <a:xfrm>
-            <a:off x="5207794" y="2536589"/>
-            <a:ext cx="3507581" cy="50006"/>
+      </p:sp>
+      <p:sp>
+        <p:nvSpPr>
+          <p:cNvPr id="24" name="Shape 21"/>
+          <p:cNvSpPr/>
+          <p:nvPr/>
+        </p:nvSpPr>
+        <p:spPr>
+          <a:xfrm>
+            <a:off x="5207794" y="2577666"/>
+            <a:ext cx="3650456" cy="50006"/>
           </a:xfrm>
           <a:prstGeom prst="rect">
             <a:avLst/>
@@ -10874,21 +10828,17 @@
           </a:solidFill>
           <a:ln/>
         </p:spPr>
-        <p:txBody>
-          <a:bodyPr/>
-          <a:p/>
-        </p:txBody>
-      </p:sp>
-      <p:sp>
-        <p:nvSpPr>
-          <p:cNvPr id="23" name="Text 20"/>
-          <p:cNvSpPr/>
-          <p:nvPr/>
-        </p:nvSpPr>
-        <p:spPr>
-          <a:xfrm>
-            <a:off x="5336381" y="2650889"/>
-            <a:ext cx="3250406" cy="132159"/>
+      </p:sp>
+      <p:sp>
+        <p:nvSpPr>
+          <p:cNvPr id="25" name="Text 22"/>
+          <p:cNvSpPr/>
+          <p:nvPr/>
+        </p:nvSpPr>
+        <p:spPr>
+          <a:xfrm>
+            <a:off x="5293519" y="2649103"/>
+            <a:ext cx="3479006" cy="132159"/>
           </a:xfrm>
           <a:prstGeom prst="rect">
             <a:avLst/>
@@ -10914,7 +10864,7 @@
                 <a:ea typeface="DM Sans Bold" pitchFamily="34" charset="-122"/>
                 <a:cs typeface="DM Sans Bold" pitchFamily="34" charset="-120"/>
               </a:rPr>
-              <a:t>TABLE CORRIGÉE</a:t>
+              <a:t>RÉFÉRENCE INSTITUTIONNELLE</a:t>
             </a:r>
             <a:endParaRPr lang="en-US" sz="700" dirty="0"/>
           </a:p>
@@ -10922,23 +10872,23 @@
       </p:sp>
       <p:sp>
         <p:nvSpPr>
-          <p:cNvPr id="24" name="Text 21"/>
-          <p:cNvSpPr/>
-          <p:nvPr/>
-        </p:nvSpPr>
-        <p:spPr>
-          <a:xfrm>
-            <a:off x="5336381" y="3050939"/>
-            <a:ext cx="364331" cy="160734"/>
-          </a:xfrm>
-          <a:prstGeom prst="rect">
-            <a:avLst/>
-          </a:prstGeom>
-          <a:noFill/>
-          <a:ln/>
-        </p:spPr>
-        <p:txBody>
-          <a:bodyPr wrap="none" lIns="0" tIns="0" rIns="0" bIns="0" rtlCol="0" anchor="t">
+          <p:cNvPr id="26" name="Text 23"/>
+          <p:cNvSpPr/>
+          <p:nvPr/>
+        </p:nvSpPr>
+        <p:spPr>
+          <a:xfrm>
+            <a:off x="5293519" y="3020578"/>
+            <a:ext cx="1321594" cy="160734"/>
+          </a:xfrm>
+          <a:prstGeom prst="rect">
+            <a:avLst/>
+          </a:prstGeom>
+          <a:noFill/>
+          <a:ln/>
+        </p:spPr>
+        <p:txBody>
+          <a:bodyPr wrap="square" lIns="0" tIns="0" rIns="0" bIns="0" rtlCol="0" anchor="t">
             <a:spAutoFit/>
           </a:bodyPr>
           <a:lstStyle/>
@@ -10955,7 +10905,7 @@
                 <a:ea typeface="DM Sans" pitchFamily="34" charset="-122"/>
                 <a:cs typeface="DM Sans" pitchFamily="34" charset="-120"/>
               </a:rPr>
-              <a:t>Labels</a:t>
+              <a:t>Candidatures officielles</a:t>
             </a:r>
             <a:endParaRPr lang="en-US" sz="900" dirty="0"/>
           </a:p>
@@ -10963,14 +10913,14 @@
       </p:sp>
       <p:sp>
         <p:nvSpPr>
-          <p:cNvPr id="25" name="Text 22"/>
-          <p:cNvSpPr/>
-          <p:nvPr/>
-        </p:nvSpPr>
-        <p:spPr>
-          <a:xfrm>
-            <a:off x="7918847" y="2883061"/>
-            <a:ext cx="667941" cy="371475"/>
+          <p:cNvPr id="27" name="Text 24"/>
+          <p:cNvSpPr/>
+          <p:nvPr/>
+        </p:nvSpPr>
+        <p:spPr>
+          <a:xfrm>
+            <a:off x="7918847" y="2852700"/>
+            <a:ext cx="853678" cy="371475"/>
           </a:xfrm>
           <a:prstGeom prst="rect">
             <a:avLst/>
@@ -10996,7 +10946,7 @@
                 <a:ea typeface="Libre Baskerville Bold" pitchFamily="34" charset="-122"/>
                 <a:cs typeface="Libre Baskerville Bold" pitchFamily="34" charset="-120"/>
               </a:rPr>
-              <a:t>1 311</a:t>
+              <a:t>3 079</a:t>
             </a:r>
             <a:endParaRPr lang="en-US" sz="2100" dirty="0"/>
           </a:p>
@@ -11004,14 +10954,14 @@
       </p:sp>
       <p:sp>
         <p:nvSpPr>
-          <p:cNvPr id="26" name="Text 23"/>
-          <p:cNvSpPr/>
-          <p:nvPr/>
-        </p:nvSpPr>
-        <p:spPr>
-          <a:xfrm>
-            <a:off x="5336381" y="3601008"/>
-            <a:ext cx="510778" cy="160734"/>
+          <p:cNvPr id="28" name="Text 25"/>
+          <p:cNvSpPr/>
+          <p:nvPr/>
+        </p:nvSpPr>
+        <p:spPr>
+          <a:xfrm>
+            <a:off x="5293519" y="3513497"/>
+            <a:ext cx="985838" cy="160734"/>
           </a:xfrm>
           <a:prstGeom prst="rect">
             <a:avLst/>
@@ -11037,7 +10987,7 @@
                 <a:ea typeface="DM Sans" pitchFamily="34" charset="-122"/>
                 <a:cs typeface="DM Sans" pitchFamily="34" charset="-120"/>
               </a:rPr>
-              <a:t>Prélabels</a:t>
+              <a:t>Labels / Prélabels</a:t>
             </a:r>
             <a:endParaRPr lang="en-US" sz="900" dirty="0"/>
           </a:p>
@@ -11045,23 +10995,23 @@
       </p:sp>
       <p:sp>
         <p:nvSpPr>
-          <p:cNvPr id="27" name="Text 24"/>
-          <p:cNvSpPr/>
-          <p:nvPr/>
-        </p:nvSpPr>
-        <p:spPr>
-          <a:xfrm>
-            <a:off x="7993856" y="3433130"/>
-            <a:ext cx="592931" cy="371475"/>
-          </a:xfrm>
-          <a:prstGeom prst="rect">
-            <a:avLst/>
-          </a:prstGeom>
-          <a:noFill/>
-          <a:ln/>
-        </p:spPr>
-        <p:txBody>
-          <a:bodyPr wrap="none" lIns="0" tIns="0" rIns="0" bIns="0" rtlCol="0" anchor="t">
+          <p:cNvPr id="29" name="Text 26"/>
+          <p:cNvSpPr/>
+          <p:nvPr/>
+        </p:nvSpPr>
+        <p:spPr>
+          <a:xfrm>
+            <a:off x="7165181" y="3345619"/>
+            <a:ext cx="1607344" cy="371475"/>
+          </a:xfrm>
+          <a:prstGeom prst="rect">
+            <a:avLst/>
+          </a:prstGeom>
+          <a:noFill/>
+          <a:ln/>
+        </p:spPr>
+        <p:txBody>
+          <a:bodyPr wrap="square" lIns="0" tIns="0" rIns="0" bIns="0" rtlCol="0" anchor="t">
             <a:spAutoFit/>
           </a:bodyPr>
           <a:lstStyle/>
@@ -11078,7 +11028,7 @@
                 <a:ea typeface="Libre Baskerville Bold" pitchFamily="34" charset="-122"/>
                 <a:cs typeface="Libre Baskerville Bold" pitchFamily="34" charset="-120"/>
               </a:rPr>
-              <a:t>623</a:t>
+              <a:t>1 356 / 641</a:t>
             </a:r>
             <a:endParaRPr lang="en-US" sz="2100" dirty="0"/>
           </a:p>
@@ -11086,14 +11036,96 @@
       </p:sp>
       <p:sp>
         <p:nvSpPr>
-          <p:cNvPr id="28" name="Text 25"/>
-          <p:cNvSpPr/>
-          <p:nvPr/>
-        </p:nvSpPr>
-        <p:spPr>
-          <a:xfrm>
-            <a:off x="1228725" y="4204655"/>
-            <a:ext cx="3679031" cy="419919"/>
+          <p:cNvPr id="30" name="Text 27"/>
+          <p:cNvSpPr/>
+          <p:nvPr/>
+        </p:nvSpPr>
+        <p:spPr>
+          <a:xfrm>
+            <a:off x="5293519" y="4006416"/>
+            <a:ext cx="1064419" cy="160734"/>
+          </a:xfrm>
+          <a:prstGeom prst="rect">
+            <a:avLst/>
+          </a:prstGeom>
+          <a:noFill/>
+          <a:ln/>
+        </p:spPr>
+        <p:txBody>
+          <a:bodyPr wrap="none" lIns="0" tIns="0" rIns="0" bIns="0" rtlCol="0" anchor="t">
+            <a:spAutoFit/>
+          </a:bodyPr>
+          <a:lstStyle/>
+          <a:p>
+            <a:pPr algn="l" indent="0" marL="0">
+              <a:buNone/>
+            </a:pPr>
+            <a:r>
+              <a:rPr lang="en-US" sz="900" dirty="0">
+                <a:solidFill>
+                  <a:srgbClr val="334E68"/>
+                </a:solidFill>
+                <a:latin typeface="DM Sans" pitchFamily="34" charset="0"/>
+                <a:ea typeface="DM Sans" pitchFamily="34" charset="-122"/>
+                <a:cs typeface="DM Sans" pitchFamily="34" charset="-120"/>
+              </a:rPr>
+              <a:t>Reportés explicites</a:t>
+            </a:r>
+            <a:endParaRPr lang="en-US" sz="900" dirty="0"/>
+          </a:p>
+        </p:txBody>
+      </p:sp>
+      <p:sp>
+        <p:nvSpPr>
+          <p:cNvPr id="31" name="Text 28"/>
+          <p:cNvSpPr/>
+          <p:nvPr/>
+        </p:nvSpPr>
+        <p:spPr>
+          <a:xfrm>
+            <a:off x="8593931" y="3838538"/>
+            <a:ext cx="178594" cy="371475"/>
+          </a:xfrm>
+          <a:prstGeom prst="rect">
+            <a:avLst/>
+          </a:prstGeom>
+          <a:noFill/>
+          <a:ln/>
+        </p:spPr>
+        <p:txBody>
+          <a:bodyPr wrap="none" lIns="0" tIns="0" rIns="0" bIns="0" rtlCol="0" anchor="t">
+            <a:spAutoFit/>
+          </a:bodyPr>
+          <a:lstStyle/>
+          <a:p>
+            <a:pPr algn="l" indent="0" marL="0">
+              <a:buNone/>
+            </a:pPr>
+            <a:r>
+              <a:rPr lang="en-US" sz="2100" b="1" dirty="0">
+                <a:solidFill>
+                  <a:srgbClr val="102A43"/>
+                </a:solidFill>
+                <a:latin typeface="Libre Baskerville Bold" pitchFamily="34" charset="0"/>
+                <a:ea typeface="Libre Baskerville Bold" pitchFamily="34" charset="-122"/>
+                <a:cs typeface="Libre Baskerville Bold" pitchFamily="34" charset="-120"/>
+              </a:rPr>
+              <a:t>5</a:t>
+            </a:r>
+            <a:endParaRPr lang="en-US" sz="2100" dirty="0"/>
+          </a:p>
+        </p:txBody>
+      </p:sp>
+      <p:sp>
+        <p:nvSpPr>
+          <p:cNvPr id="32" name="Text 29"/>
+          <p:cNvSpPr/>
+          <p:nvPr/>
+        </p:nvSpPr>
+        <p:spPr>
+          <a:xfrm>
+            <a:off x="1085850" y="4452900"/>
+            <a:ext cx="3850481" cy="559891"/>
           </a:xfrm>
           <a:prstGeom prst="rect">
             <a:avLst/>
@@ -11122,7 +11154,7 @@
                 <a:ea typeface="DM Sans Bold" pitchFamily="34" charset="-122"/>
                 <a:cs typeface="DM Sans Bold" pitchFamily="34" charset="-120"/>
               </a:rPr>
-              <a:t>Variation observée</a:t>
+              <a:t>Lecture de l’écart</a:t>
             </a:r>
             <a:r>
               <a:rPr lang="en-US" sz="750" dirty="0">
@@ -11145,7 +11177,29 @@
                 <a:ea typeface="DM Sans" pitchFamily="34" charset="-122"/>
                 <a:cs typeface="DM Sans" pitchFamily="34" charset="-120"/>
               </a:rPr>
-              <a:t>−13 Labels et +6 Prélabels après rapprochement avec les sources de session.</a:t>
+              <a:t>Les 3 558 candidatures corrigées = 3 555 lignes PDF + 3 ajournés hors PDF : 2 en </a:t>
+            </a:r>
+            <a:r>
+              <a:rPr lang="en-US" sz="750" dirty="0">
+                <a:solidFill>
+                  <a:srgbClr val="486581"/>
+                </a:solidFill>
+                <a:latin typeface="DM Sans" pitchFamily="34" charset="0"/>
+                <a:ea typeface="DM Sans" pitchFamily="34" charset="-122"/>
+                <a:cs typeface="DM Sans" pitchFamily="34" charset="-120"/>
+              </a:rPr>
+              <a:t>03/2019 et 1 en 06/2019. Les noms de ces trois dossiers ne sont pas publiés dans </a:t>
+            </a:r>
+            <a:r>
+              <a:rPr lang="en-US" sz="750" dirty="0">
+                <a:solidFill>
+                  <a:srgbClr val="486581"/>
+                </a:solidFill>
+                <a:latin typeface="DM Sans" pitchFamily="34" charset="0"/>
+                <a:ea typeface="DM Sans" pitchFamily="34" charset="-122"/>
+                <a:cs typeface="DM Sans" pitchFamily="34" charset="-120"/>
+              </a:rPr>
+              <a:t>les éléments disponibles.</a:t>
             </a:r>
             <a:endParaRPr lang="en-US" sz="700" dirty="0"/>
           </a:p>
@@ -11153,14 +11207,14 @@
       </p:sp>
       <p:sp>
         <p:nvSpPr>
-          <p:cNvPr id="29" name="Text 26"/>
-          <p:cNvSpPr/>
-          <p:nvPr/>
-        </p:nvSpPr>
-        <p:spPr>
-          <a:xfrm>
-            <a:off x="5036344" y="4204655"/>
-            <a:ext cx="3679031" cy="419919"/>
+          <p:cNvPr id="33" name="Text 30"/>
+          <p:cNvSpPr/>
+          <p:nvPr/>
+        </p:nvSpPr>
+        <p:spPr>
+          <a:xfrm>
+            <a:off x="5007769" y="4452900"/>
+            <a:ext cx="3850481" cy="559891"/>
           </a:xfrm>
           <a:prstGeom prst="rect">
             <a:avLst/>
@@ -11189,7 +11243,7 @@
                 <a:ea typeface="DM Sans Bold" pitchFamily="34" charset="-122"/>
                 <a:cs typeface="DM Sans Bold" pitchFamily="34" charset="-120"/>
               </a:rPr>
-              <a:t>Règle analytique</a:t>
+              <a:t>Cas S62</a:t>
             </a:r>
             <a:r>
               <a:rPr lang="en-US" sz="750" dirty="0">
@@ -11212,7 +11266,7 @@
                 <a:ea typeface="DM Sans" pitchFamily="34" charset="-122"/>
                 <a:cs typeface="DM Sans" pitchFamily="34" charset="-120"/>
               </a:rPr>
-              <a:t>Les compteurs officiels et les lignes individuelles PDF restent conservés dans </a:t>
+              <a:t>Le PDF retient 46 lignes, alors que le site publie 39 candidatures. Les 14 Labels </a:t>
             </a:r>
             <a:r>
               <a:rPr lang="en-US" sz="750" dirty="0">
@@ -11223,48 +11277,62 @@
                 <a:ea typeface="DM Sans" pitchFamily="34" charset="-122"/>
                 <a:cs typeface="DM Sans" pitchFamily="34" charset="-120"/>
               </a:rPr>
-              <a:t>deux couches distinctes.</a:t>
-            </a:r>
-            <a:endParaRPr lang="en-US" sz="700" dirty="0"/>
-          </a:p>
-        </p:txBody>
-      </p:sp>
-      <p:sp>
-        <p:nvSpPr>
-          <p:cNvPr id="30" name="Text 27"/>
-          <p:cNvSpPr/>
-          <p:nvPr/>
-        </p:nvSpPr>
-        <p:spPr>
-          <a:xfrm>
-            <a:off x="1228725" y="4710299"/>
-            <a:ext cx="7486650" cy="103584"/>
-          </a:xfrm>
-          <a:prstGeom prst="rect">
-            <a:avLst/>
-          </a:prstGeom>
-          <a:noFill/>
-          <a:ln/>
-        </p:spPr>
-        <p:txBody>
-          <a:bodyPr wrap="square" lIns="0" tIns="0" rIns="0" bIns="0" rtlCol="0" anchor="t">
-            <a:spAutoFit/>
-          </a:bodyPr>
-          <a:lstStyle/>
-          <a:p>
-            <a:pPr algn="l" indent="0" marL="0">
-              <a:buNone/>
-            </a:pPr>
-            <a:r>
-              <a:rPr lang="en-US" sz="550" dirty="0">
-                <a:solidFill>
-                  <a:srgbClr val="627D98"/>
+              <a:t>détaillés comprennent 9 Labels initiaux et 5 conversions ; les 4 dossiers </a:t>
+            </a:r>
+            <a:r>
+              <a:rPr lang="en-US" sz="750" dirty="0">
+                <a:solidFill>
+                  <a:srgbClr val="486581"/>
                 </a:solidFill>
                 <a:latin typeface="DM Sans" pitchFamily="34" charset="0"/>
                 <a:ea typeface="DM Sans" pitchFamily="34" charset="-122"/>
                 <a:cs typeface="DM Sans" pitchFamily="34" charset="-120"/>
               </a:rPr>
-              <a:t>Source : corrections.json, rapports PDF et documentation méthodologique du dépôt.</a:t>
+              <a:t>administratifs restent « Décision non précisée ».</a:t>
+            </a:r>
+            <a:endParaRPr lang="en-US" sz="700" dirty="0"/>
+          </a:p>
+        </p:txBody>
+      </p:sp>
+      <p:sp>
+        <p:nvSpPr>
+          <p:cNvPr id="34" name="Text 31"/>
+          <p:cNvSpPr/>
+          <p:nvPr/>
+        </p:nvSpPr>
+        <p:spPr>
+          <a:xfrm>
+            <a:off x="1085850" y="5141379"/>
+            <a:ext cx="7772400" cy="110003"/>
+          </a:xfrm>
+          <a:prstGeom prst="rect">
+            <a:avLst/>
+          </a:prstGeom>
+          <a:noFill/>
+          <a:ln/>
+        </p:spPr>
+        <p:txBody>
+          <a:bodyPr wrap="none" lIns="0" tIns="0" rIns="0" bIns="0" rtlCol="0" anchor="t">
+            <a:spAutoFit/>
+          </a:bodyPr>
+          <a:lstStyle/>
+          <a:p>
+            <a:pPr algn="l" indent="0" marL="0">
+              <a:lnSpc>
+                <a:spcPct val="112000"/>
+              </a:lnSpc>
+              <a:buNone/>
+            </a:pPr>
+            <a:r>
+              <a:rPr lang="en-US" sz="550" dirty="0">
+                <a:solidFill>
+                  <a:srgbClr val="627D98"/>
+                </a:solidFill>
+                <a:latin typeface="DM Sans" pitchFamily="34" charset="0"/>
+                <a:ea typeface="DM Sans" pitchFamily="34" charset="-122"/>
+                <a:cs typeface="DM Sans" pitchFamily="34" charset="-120"/>
+              </a:rPr>
+              <a:t>Source : corrections documentées, comptes rendus PDF S0–S87 et exports 88 sessions audités. Les trois périmètres sont publiés séparément.</a:t>
             </a:r>
             <a:endParaRPr lang="en-US" sz="550" dirty="0"/>
           </a:p>
@@ -11338,10 +11406,6 @@
           </a:solidFill>
           <a:ln/>
         </p:spPr>
-        <p:txBody>
-          <a:bodyPr/>
-          <a:p/>
-        </p:txBody>
       </p:sp>
       <p:sp>
         <p:nvSpPr>
@@ -11392,8 +11456,8 @@
         </p:nvSpPr>
         <p:spPr>
           <a:xfrm rot="10800000">
-            <a:off x="348258" y="2005608"/>
-            <a:ext cx="103584" cy="1393031"/>
+            <a:off x="353616" y="1960178"/>
+            <a:ext cx="92869" cy="1494551"/>
           </a:xfrm>
           <a:prstGeom prst="rect">
             <a:avLst/>
@@ -11433,8 +11497,8 @@
         </p:nvSpPr>
         <p:spPr>
           <a:xfrm>
-            <a:off x="330398" y="4818459"/>
-            <a:ext cx="139303" cy="110728"/>
+            <a:off x="338044" y="4829119"/>
+            <a:ext cx="123955" cy="100013"/>
           </a:xfrm>
           <a:prstGeom prst="rect">
             <a:avLst/>
@@ -11475,7 +11539,7 @@
         <p:spPr>
           <a:xfrm>
             <a:off x="1385888" y="392906"/>
-            <a:ext cx="6072188" cy="110728"/>
+            <a:ext cx="5127594" cy="100013"/>
           </a:xfrm>
           <a:prstGeom prst="rect">
             <a:avLst/>
@@ -11515,17 +11579,17 @@
         </p:nvSpPr>
         <p:spPr>
           <a:xfrm>
-            <a:off x="1385888" y="589359"/>
-            <a:ext cx="6072188" cy="640593"/>
-          </a:xfrm>
-          <a:prstGeom prst="rect">
-            <a:avLst/>
-          </a:prstGeom>
-          <a:noFill/>
-          <a:ln/>
-        </p:spPr>
-        <p:txBody>
-          <a:bodyPr wrap="square" lIns="0" tIns="0" rIns="0" bIns="0" rtlCol="0" anchor="t">
+            <a:off x="1385888" y="578644"/>
+            <a:ext cx="5127594" cy="320297"/>
+          </a:xfrm>
+          <a:prstGeom prst="rect">
+            <a:avLst/>
+          </a:prstGeom>
+          <a:noFill/>
+          <a:ln/>
+        </p:spPr>
+        <p:txBody>
+          <a:bodyPr wrap="none" lIns="0" tIns="0" rIns="0" bIns="0" rtlCol="0" anchor="t">
             <a:spAutoFit/>
           </a:bodyPr>
           <a:lstStyle/>
@@ -11545,7 +11609,7 @@
                 <a:ea typeface="Libre Baskerville Bold" pitchFamily="34" charset="-122"/>
                 <a:cs typeface="Libre Baskerville Bold" pitchFamily="34" charset="-120"/>
               </a:rPr>
-              <a:t>85 sessions, 3 393 candidatures, 1 934 décisions positives</a:t>
+              <a:t>88 sessions, trois périmètres de candidatures</a:t>
             </a:r>
             <a:endParaRPr lang="en-US" sz="1900" dirty="0"/>
           </a:p>
@@ -11559,8 +11623,8 @@
         </p:nvSpPr>
         <p:spPr>
           <a:xfrm>
-            <a:off x="7847409" y="392906"/>
-            <a:ext cx="753666" cy="837047"/>
+            <a:off x="8043863" y="392906"/>
+            <a:ext cx="557213" cy="642938"/>
           </a:xfrm>
           <a:prstGeom prst="rect">
             <a:avLst/>
@@ -11600,8 +11664,8 @@
         </p:nvSpPr>
         <p:spPr>
           <a:xfrm>
-            <a:off x="1385888" y="1822884"/>
-            <a:ext cx="3751864" cy="132159"/>
+            <a:off x="1385888" y="1628775"/>
+            <a:ext cx="3751864" cy="114300"/>
           </a:xfrm>
           <a:prstGeom prst="rect">
             <a:avLst/>
@@ -11627,7 +11691,7 @@
                 <a:ea typeface="DM Sans Bold" pitchFamily="34" charset="-122"/>
                 <a:cs typeface="DM Sans Bold" pitchFamily="34" charset="-120"/>
               </a:rPr>
-              <a:t>LABELS + PRÉLABELS ACCORDÉS</a:t>
+              <a:t>CANDIDATURES CORRIGÉES DE L’ÉTUDE</a:t>
             </a:r>
             <a:endParaRPr lang="en-US" sz="700" dirty="0"/>
           </a:p>
@@ -11641,8 +11705,8 @@
         </p:nvSpPr>
         <p:spPr>
           <a:xfrm>
-            <a:off x="1385888" y="1997906"/>
-            <a:ext cx="3751864" cy="714375"/>
+            <a:off x="1385888" y="1785938"/>
+            <a:ext cx="3751864" cy="657225"/>
           </a:xfrm>
           <a:prstGeom prst="rect">
             <a:avLst/>
@@ -11663,7 +11727,7 @@
               <a:buNone/>
             </a:pPr>
             <a:r>
-              <a:rPr lang="en-US" sz="5500" dirty="0">
+              <a:rPr lang="en-US" sz="5050" dirty="0">
                 <a:solidFill>
                   <a:srgbClr val="102A43"/>
                 </a:solidFill>
@@ -11671,9 +11735,9 @@
                 <a:ea typeface="Libre Baskerville" pitchFamily="34" charset="-122"/>
                 <a:cs typeface="Libre Baskerville" pitchFamily="34" charset="-120"/>
               </a:rPr>
-              <a:t>1 934</a:t>
-            </a:r>
-            <a:endParaRPr lang="en-US" sz="5500" dirty="0"/>
+              <a:t>3 558</a:t>
+            </a:r>
+            <a:endParaRPr lang="en-US" sz="5050" dirty="0"/>
           </a:p>
         </p:txBody>
       </p:sp>
@@ -11685,8 +11749,8 @@
         </p:nvSpPr>
         <p:spPr>
           <a:xfrm>
-            <a:off x="1385888" y="2769431"/>
-            <a:ext cx="3751864" cy="178594"/>
+            <a:off x="1385888" y="2500313"/>
+            <a:ext cx="3751864" cy="150019"/>
           </a:xfrm>
           <a:prstGeom prst="rect">
             <a:avLst/>
@@ -11704,7 +11768,7 @@
               <a:buNone/>
             </a:pPr>
             <a:r>
-              <a:rPr lang="en-US" sz="1000" dirty="0">
+              <a:rPr lang="en-US" sz="950" dirty="0">
                 <a:solidFill>
                   <a:srgbClr val="486581"/>
                 </a:solidFill>
@@ -11712,9 +11776,9 @@
                 <a:ea typeface="DM Sans" pitchFamily="34" charset="-122"/>
                 <a:cs typeface="DM Sans" pitchFamily="34" charset="-120"/>
               </a:rPr>
-              <a:t>un total descriptif de décisions positives</a:t>
-            </a:r>
-            <a:endParaRPr lang="en-US" sz="1000" dirty="0"/>
+              <a:t>3 555 lignes PDF + 3 ajournés hors PDF</a:t>
+            </a:r>
+            <a:endParaRPr lang="en-US" sz="950" dirty="0"/>
           </a:p>
         </p:txBody>
       </p:sp>
@@ -11726,8 +11790,8 @@
         </p:nvSpPr>
         <p:spPr>
           <a:xfrm>
-            <a:off x="5509227" y="2063986"/>
-            <a:ext cx="3091793" cy="482203"/>
+            <a:off x="5509227" y="1510568"/>
+            <a:ext cx="3091793" cy="694339"/>
           </a:xfrm>
           <a:prstGeom prst="rect">
             <a:avLst/>
@@ -11748,7 +11812,7 @@
               <a:buNone/>
             </a:pPr>
             <a:r>
-              <a:rPr lang="en-US" sz="1300" dirty="0">
+              <a:rPr lang="en-US" sz="1250" dirty="0">
                 <a:solidFill>
                   <a:srgbClr val="D97706"/>
                 </a:solidFill>
@@ -11756,10 +11820,10 @@
                 <a:ea typeface="Libre Baskerville" pitchFamily="34" charset="-122"/>
                 <a:cs typeface="Libre Baskerville" pitchFamily="34" charset="-120"/>
               </a:rPr>
-              <a:t>1 311</a:t>
-            </a:r>
-            <a:r>
-              <a:rPr lang="en-US" sz="1300" dirty="0">
+              <a:t>3 079</a:t>
+            </a:r>
+            <a:r>
+              <a:rPr lang="en-US" sz="1250" dirty="0">
                 <a:solidFill>
                   <a:srgbClr val="102A43"/>
                 </a:solidFill>
@@ -11767,10 +11831,10 @@
                 <a:ea typeface="Libre Baskerville" pitchFamily="34" charset="-122"/>
                 <a:cs typeface="Libre Baskerville" pitchFamily="34" charset="-120"/>
               </a:rPr>
-              <a:t> Labels</a:t>
-            </a:r>
-            <a:r>
-              <a:rPr lang="en-US" sz="1300" dirty="0">
+              <a:t> candidatures</a:t>
+            </a:r>
+            <a:r>
+              <a:rPr lang="en-US" sz="1250" dirty="0">
                 <a:solidFill>
                   <a:srgbClr val="102A43"/>
                 </a:solidFill>
@@ -11782,18 +11846,18 @@
 </a:t>
             </a:r>
             <a:r>
-              <a:rPr lang="en-US" sz="1300" dirty="0">
-                <a:solidFill>
-                  <a:srgbClr val="D97706"/>
+              <a:rPr lang="en-US" sz="1250" dirty="0">
+                <a:solidFill>
+                  <a:srgbClr val="102A43"/>
                 </a:solidFill>
                 <a:latin typeface="Libre Baskerville" pitchFamily="34" charset="0"/>
                 <a:ea typeface="Libre Baskerville" pitchFamily="34" charset="-122"/>
                 <a:cs typeface="Libre Baskerville" pitchFamily="34" charset="-120"/>
               </a:rPr>
-              <a:t>623</a:t>
-            </a:r>
-            <a:r>
-              <a:rPr lang="en-US" sz="1300" dirty="0">
+              <a:t>selon le compteur officiel</a:t>
+            </a:r>
+            <a:r>
+              <a:rPr lang="en-US" sz="1250" dirty="0">
                 <a:solidFill>
                   <a:srgbClr val="102A43"/>
                 </a:solidFill>
@@ -11801,40 +11865,11 @@
                 <a:ea typeface="Libre Baskerville" pitchFamily="34" charset="-122"/>
                 <a:cs typeface="Libre Baskerville" pitchFamily="34" charset="-120"/>
               </a:rPr>
-              <a:t> Prélabels</a:t>
-            </a:r>
-            <a:endParaRPr lang="en-US" sz="1300" dirty="0"/>
-          </a:p>
-        </p:txBody>
-      </p:sp>
-      <p:sp>
-        <p:nvSpPr>
-          <p:cNvPr id="14" name="Text 11"/>
-          <p:cNvSpPr/>
-          <p:nvPr/>
-        </p:nvSpPr>
-        <p:spPr>
-          <a:xfrm>
-            <a:off x="1385888" y="3523097"/>
-            <a:ext cx="1659136" cy="339328"/>
-          </a:xfrm>
-          <a:prstGeom prst="rect">
-            <a:avLst/>
-          </a:prstGeom>
-          <a:noFill/>
-          <a:ln/>
-        </p:spPr>
-        <p:txBody>
-          <a:bodyPr wrap="square" lIns="0" tIns="0" rIns="0" bIns="0" rtlCol="0" anchor="t">
-            <a:spAutoFit/>
-          </a:bodyPr>
-          <a:lstStyle/>
-          <a:p>
-            <a:pPr algn="l" indent="0" marL="0">
-              <a:buNone/>
-            </a:pPr>
-            <a:r>
-              <a:rPr lang="en-US" sz="2050" dirty="0">
+              <a:t>
+</a:t>
+            </a:r>
+            <a:r>
+              <a:rPr lang="en-US" sz="1250" dirty="0">
                 <a:solidFill>
                   <a:srgbClr val="102A43"/>
                 </a:solidFill>
@@ -11842,7 +11877,92 @@
                 <a:ea typeface="Libre Baskerville" pitchFamily="34" charset="-122"/>
                 <a:cs typeface="Libre Baskerville" pitchFamily="34" charset="-120"/>
               </a:rPr>
-              <a:t>3 393</a:t>
+              <a:t>Startup Tunisia</a:t>
+            </a:r>
+            <a:endParaRPr lang="en-US" sz="1250" dirty="0"/>
+          </a:p>
+        </p:txBody>
+      </p:sp>
+      <p:sp>
+        <p:nvSpPr>
+          <p:cNvPr id="14" name="Text 11"/>
+          <p:cNvSpPr/>
+          <p:nvPr/>
+        </p:nvSpPr>
+        <p:spPr>
+          <a:xfrm>
+            <a:off x="5509227" y="2276345"/>
+            <a:ext cx="2786063" cy="434987"/>
+          </a:xfrm>
+          <a:prstGeom prst="rect">
+            <a:avLst/>
+          </a:prstGeom>
+          <a:noFill/>
+          <a:ln/>
+        </p:spPr>
+        <p:txBody>
+          <a:bodyPr wrap="square" lIns="0" tIns="0" rIns="0" bIns="0" rtlCol="0" anchor="t">
+            <a:spAutoFit/>
+          </a:bodyPr>
+          <a:lstStyle/>
+          <a:p>
+            <a:pPr algn="l" indent="0" marL="0">
+              <a:lnSpc>
+                <a:spcPct val="116000"/>
+              </a:lnSpc>
+              <a:buNone/>
+            </a:pPr>
+            <a:r>
+              <a:rPr lang="en-US" sz="750" dirty="0">
+                <a:solidFill>
+                  <a:srgbClr val="627D98"/>
+                </a:solidFill>
+                <a:latin typeface="DM Sans" pitchFamily="34" charset="0"/>
+                <a:ea typeface="DM Sans" pitchFamily="34" charset="-122"/>
+                <a:cs typeface="DM Sans" pitchFamily="34" charset="-120"/>
+              </a:rPr>
+              <a:t>Les 3 ajournés hors PDF sont signalés par des commentaires officiels : 2 en 03/2019 et 1 en 06/2019. Les noms ne sont pas publiés dans les éléments disponibles.</a:t>
+            </a:r>
+            <a:endParaRPr lang="en-US" sz="750" dirty="0"/>
+          </a:p>
+        </p:txBody>
+      </p:sp>
+      <p:sp>
+        <p:nvSpPr>
+          <p:cNvPr id="15" name="Text 12"/>
+          <p:cNvSpPr/>
+          <p:nvPr/>
+        </p:nvSpPr>
+        <p:spPr>
+          <a:xfrm>
+            <a:off x="1385888" y="3328988"/>
+            <a:ext cx="1659136" cy="310753"/>
+          </a:xfrm>
+          <a:prstGeom prst="rect">
+            <a:avLst/>
+          </a:prstGeom>
+          <a:noFill/>
+          <a:ln/>
+        </p:spPr>
+        <p:txBody>
+          <a:bodyPr wrap="square" lIns="0" tIns="0" rIns="0" bIns="0" rtlCol="0" anchor="t">
+            <a:spAutoFit/>
+          </a:bodyPr>
+          <a:lstStyle/>
+          <a:p>
+            <a:pPr algn="l" indent="0" marL="0">
+              <a:buNone/>
+            </a:pPr>
+            <a:r>
+              <a:rPr lang="en-US" sz="2050" dirty="0">
+                <a:solidFill>
+                  <a:srgbClr val="102A43"/>
+                </a:solidFill>
+                <a:latin typeface="Libre Baskerville" pitchFamily="34" charset="0"/>
+                <a:ea typeface="Libre Baskerville" pitchFamily="34" charset="-122"/>
+                <a:cs typeface="Libre Baskerville" pitchFamily="34" charset="-120"/>
+              </a:rPr>
+              <a:t>1 997</a:t>
             </a:r>
             <a:endParaRPr lang="en-US" sz="2050" dirty="0"/>
           </a:p>
@@ -11850,13 +11970,13 @@
       </p:sp>
       <p:sp>
         <p:nvSpPr>
-          <p:cNvPr id="15" name="Text 12"/>
-          <p:cNvSpPr/>
-          <p:nvPr/>
-        </p:nvSpPr>
-        <p:spPr>
-          <a:xfrm>
-            <a:off x="1385888" y="3912431"/>
+          <p:cNvPr id="16" name="Text 13"/>
+          <p:cNvSpPr/>
+          <p:nvPr/>
+        </p:nvSpPr>
+        <p:spPr>
+          <a:xfrm>
+            <a:off x="1385888" y="3689747"/>
             <a:ext cx="1659136" cy="135006"/>
           </a:xfrm>
           <a:prstGeom prst="rect">
@@ -11886,7 +12006,7 @@
                 <a:ea typeface="DM Sans Bold" pitchFamily="34" charset="-122"/>
                 <a:cs typeface="DM Sans Bold" pitchFamily="34" charset="-120"/>
               </a:rPr>
-              <a:t>CANDIDATURES</a:t>
+              <a:t>LABELS + PRÉLABELS</a:t>
             </a:r>
             <a:endParaRPr lang="en-US" sz="700" dirty="0"/>
           </a:p>
@@ -11894,13 +12014,13 @@
       </p:sp>
       <p:sp>
         <p:nvSpPr>
-          <p:cNvPr id="16" name="Text 13"/>
-          <p:cNvSpPr/>
-          <p:nvPr/>
-        </p:nvSpPr>
-        <p:spPr>
-          <a:xfrm>
-            <a:off x="1385888" y="4090299"/>
+          <p:cNvPr id="17" name="Text 14"/>
+          <p:cNvSpPr/>
+          <p:nvPr/>
+        </p:nvSpPr>
+        <p:spPr>
+          <a:xfrm>
+            <a:off x="1385888" y="3867615"/>
             <a:ext cx="1659136" cy="125350"/>
           </a:xfrm>
           <a:prstGeom prst="rect">
@@ -11930,7 +12050,7 @@
                 <a:ea typeface="DM Sans" pitchFamily="34" charset="-122"/>
                 <a:cs typeface="DM Sans" pitchFamily="34" charset="-120"/>
               </a:rPr>
-              <a:t>Somme du tableau corrigé</a:t>
+              <a:t>Décisions positives officielles</a:t>
             </a:r>
             <a:endParaRPr lang="en-US" sz="650" dirty="0"/>
           </a:p>
@@ -11938,14 +12058,14 @@
       </p:sp>
       <p:sp>
         <p:nvSpPr>
-          <p:cNvPr id="17" name="Text 14"/>
-          <p:cNvSpPr/>
-          <p:nvPr/>
-        </p:nvSpPr>
-        <p:spPr>
-          <a:xfrm>
-            <a:off x="3237905" y="3523097"/>
-            <a:ext cx="1659136" cy="339328"/>
+          <p:cNvPr id="18" name="Text 15"/>
+          <p:cNvSpPr/>
+          <p:nvPr/>
+        </p:nvSpPr>
+        <p:spPr>
+          <a:xfrm>
+            <a:off x="3237905" y="3328988"/>
+            <a:ext cx="1659136" cy="310753"/>
           </a:xfrm>
           <a:prstGeom prst="rect">
             <a:avLst/>
@@ -11971,7 +12091,7 @@
                 <a:ea typeface="Libre Baskerville" pitchFamily="34" charset="-122"/>
                 <a:cs typeface="Libre Baskerville" pitchFamily="34" charset="-120"/>
               </a:rPr>
-              <a:t>44,3 %</a:t>
+              <a:t>44,0 %</a:t>
             </a:r>
             <a:endParaRPr lang="en-US" sz="2050" dirty="0"/>
           </a:p>
@@ -11979,13 +12099,13 @@
       </p:sp>
       <p:sp>
         <p:nvSpPr>
-          <p:cNvPr id="18" name="Text 15"/>
-          <p:cNvSpPr/>
-          <p:nvPr/>
-        </p:nvSpPr>
-        <p:spPr>
-          <a:xfrm>
-            <a:off x="3237905" y="3912431"/>
+          <p:cNvPr id="19" name="Text 16"/>
+          <p:cNvSpPr/>
+          <p:nvPr/>
+        </p:nvSpPr>
+        <p:spPr>
+          <a:xfrm>
+            <a:off x="3237905" y="3689747"/>
             <a:ext cx="1659136" cy="135006"/>
           </a:xfrm>
           <a:prstGeom prst="rect">
@@ -12023,13 +12143,13 @@
       </p:sp>
       <p:sp>
         <p:nvSpPr>
-          <p:cNvPr id="19" name="Text 16"/>
-          <p:cNvSpPr/>
-          <p:nvPr/>
-        </p:nvSpPr>
-        <p:spPr>
-          <a:xfrm>
-            <a:off x="3237905" y="4090299"/>
+          <p:cNvPr id="20" name="Text 17"/>
+          <p:cNvSpPr/>
+          <p:nvPr/>
+        </p:nvSpPr>
+        <p:spPr>
+          <a:xfrm>
+            <a:off x="3237905" y="3867615"/>
             <a:ext cx="1659136" cy="125350"/>
           </a:xfrm>
           <a:prstGeom prst="rect">
@@ -12059,7 +12179,7 @@
                 <a:ea typeface="DM Sans" pitchFamily="34" charset="-122"/>
                 <a:cs typeface="DM Sans" pitchFamily="34" charset="-120"/>
               </a:rPr>
-              <a:t>Labels / candidatures</a:t>
+              <a:t>1 356 / 3 079 officiel</a:t>
             </a:r>
             <a:endParaRPr lang="en-US" sz="650" dirty="0"/>
           </a:p>
@@ -12067,14 +12187,14 @@
       </p:sp>
       <p:sp>
         <p:nvSpPr>
-          <p:cNvPr id="20" name="Text 17"/>
-          <p:cNvSpPr/>
-          <p:nvPr/>
-        </p:nvSpPr>
-        <p:spPr>
-          <a:xfrm>
-            <a:off x="5089922" y="3523097"/>
-            <a:ext cx="1659136" cy="339328"/>
+          <p:cNvPr id="21" name="Text 18"/>
+          <p:cNvSpPr/>
+          <p:nvPr/>
+        </p:nvSpPr>
+        <p:spPr>
+          <a:xfrm>
+            <a:off x="5089922" y="3328988"/>
+            <a:ext cx="1659136" cy="310753"/>
           </a:xfrm>
           <a:prstGeom prst="rect">
             <a:avLst/>
@@ -12100,7 +12220,7 @@
                 <a:ea typeface="Libre Baskerville" pitchFamily="34" charset="-122"/>
                 <a:cs typeface="Libre Baskerville" pitchFamily="34" charset="-120"/>
               </a:rPr>
-              <a:t>34,8</a:t>
+              <a:t>35,0</a:t>
             </a:r>
             <a:endParaRPr lang="en-US" sz="2050" dirty="0"/>
           </a:p>
@@ -12108,13 +12228,13 @@
       </p:sp>
       <p:sp>
         <p:nvSpPr>
-          <p:cNvPr id="21" name="Text 18"/>
-          <p:cNvSpPr/>
-          <p:nvPr/>
-        </p:nvSpPr>
-        <p:spPr>
-          <a:xfrm>
-            <a:off x="5089922" y="3912431"/>
+          <p:cNvPr id="22" name="Text 19"/>
+          <p:cNvSpPr/>
+          <p:nvPr/>
+        </p:nvSpPr>
+        <p:spPr>
+          <a:xfrm>
+            <a:off x="5089922" y="3689747"/>
             <a:ext cx="1659136" cy="135006"/>
           </a:xfrm>
           <a:prstGeom prst="rect">
@@ -12152,13 +12272,13 @@
       </p:sp>
       <p:sp>
         <p:nvSpPr>
-          <p:cNvPr id="22" name="Text 19"/>
-          <p:cNvSpPr/>
-          <p:nvPr/>
-        </p:nvSpPr>
-        <p:spPr>
-          <a:xfrm>
-            <a:off x="5089922" y="4090299"/>
+          <p:cNvPr id="23" name="Text 20"/>
+          <p:cNvSpPr/>
+          <p:nvPr/>
+        </p:nvSpPr>
+        <p:spPr>
+          <a:xfrm>
+            <a:off x="5089922" y="3867615"/>
             <a:ext cx="1659136" cy="125350"/>
           </a:xfrm>
           <a:prstGeom prst="rect">
@@ -12188,7 +12308,7 @@
                 <a:ea typeface="DM Sans" pitchFamily="34" charset="-122"/>
                 <a:cs typeface="DM Sans" pitchFamily="34" charset="-120"/>
               </a:rPr>
-              <a:t>Candidatures par session</a:t>
+              <a:t>Candidatures officielles</a:t>
             </a:r>
             <a:endParaRPr lang="en-US" sz="650" dirty="0"/>
           </a:p>
@@ -12196,14 +12316,14 @@
       </p:sp>
       <p:sp>
         <p:nvSpPr>
-          <p:cNvPr id="23" name="Text 20"/>
-          <p:cNvSpPr/>
-          <p:nvPr/>
-        </p:nvSpPr>
-        <p:spPr>
-          <a:xfrm>
-            <a:off x="6941939" y="3523097"/>
-            <a:ext cx="1659136" cy="339328"/>
+          <p:cNvPr id="24" name="Text 21"/>
+          <p:cNvSpPr/>
+          <p:nvPr/>
+        </p:nvSpPr>
+        <p:spPr>
+          <a:xfrm>
+            <a:off x="6941939" y="3328988"/>
+            <a:ext cx="1659136" cy="310753"/>
           </a:xfrm>
           <a:prstGeom prst="rect">
             <a:avLst/>
@@ -12229,7 +12349,7 @@
                 <a:ea typeface="Libre Baskerville" pitchFamily="34" charset="-122"/>
                 <a:cs typeface="Libre Baskerville" pitchFamily="34" charset="-120"/>
               </a:rPr>
-              <a:t>36</a:t>
+              <a:t>3 555</a:t>
             </a:r>
             <a:endParaRPr lang="en-US" sz="2050" dirty="0"/>
           </a:p>
@@ -12237,13 +12357,13 @@
       </p:sp>
       <p:sp>
         <p:nvSpPr>
-          <p:cNvPr id="24" name="Text 21"/>
-          <p:cNvSpPr/>
-          <p:nvPr/>
-        </p:nvSpPr>
-        <p:spPr>
-          <a:xfrm>
-            <a:off x="6941939" y="3912431"/>
+          <p:cNvPr id="25" name="Text 22"/>
+          <p:cNvSpPr/>
+          <p:nvPr/>
+        </p:nvSpPr>
+        <p:spPr>
+          <a:xfrm>
+            <a:off x="6941939" y="3689747"/>
             <a:ext cx="1659136" cy="135006"/>
           </a:xfrm>
           <a:prstGeom prst="rect">
@@ -12273,7 +12393,7 @@
                 <a:ea typeface="DM Sans Bold" pitchFamily="34" charset="-122"/>
                 <a:cs typeface="DM Sans Bold" pitchFamily="34" charset="-120"/>
               </a:rPr>
-              <a:t>MÉDIANE / SESSION</a:t>
+              <a:t>LIGNES DÉTAILLÉES PDF</a:t>
             </a:r>
             <a:endParaRPr lang="en-US" sz="700" dirty="0"/>
           </a:p>
@@ -12281,23 +12401,23 @@
       </p:sp>
       <p:sp>
         <p:nvSpPr>
-          <p:cNvPr id="25" name="Text 22"/>
-          <p:cNvSpPr/>
-          <p:nvPr/>
-        </p:nvSpPr>
-        <p:spPr>
-          <a:xfrm>
-            <a:off x="6941939" y="4090299"/>
-            <a:ext cx="1659136" cy="125350"/>
-          </a:xfrm>
-          <a:prstGeom prst="rect">
-            <a:avLst/>
-          </a:prstGeom>
-          <a:noFill/>
-          <a:ln/>
-        </p:spPr>
-        <p:txBody>
-          <a:bodyPr wrap="none" lIns="0" tIns="0" rIns="0" bIns="0" rtlCol="0" anchor="t">
+          <p:cNvPr id="26" name="Text 23"/>
+          <p:cNvSpPr/>
+          <p:nvPr/>
+        </p:nvSpPr>
+        <p:spPr>
+          <a:xfrm>
+            <a:off x="6941939" y="3867615"/>
+            <a:ext cx="1659136" cy="250701"/>
+          </a:xfrm>
+          <a:prstGeom prst="rect">
+            <a:avLst/>
+          </a:prstGeom>
+          <a:noFill/>
+          <a:ln/>
+        </p:spPr>
+        <p:txBody>
+          <a:bodyPr wrap="square" lIns="0" tIns="0" rIns="0" bIns="0" rtlCol="0" anchor="t">
             <a:spAutoFit/>
           </a:bodyPr>
           <a:lstStyle/>
@@ -12317,7 +12437,7 @@
                 <a:ea typeface="DM Sans" pitchFamily="34" charset="-122"/>
                 <a:cs typeface="DM Sans" pitchFamily="34" charset="-120"/>
               </a:rPr>
-              <a:t>Candidatures par session</a:t>
+              <a:t>Registre des décisions, conversions et retraits</a:t>
             </a:r>
             <a:endParaRPr lang="en-US" sz="650" dirty="0"/>
           </a:p>
@@ -12325,14 +12445,14 @@
       </p:sp>
       <p:sp>
         <p:nvSpPr>
-          <p:cNvPr id="26" name="Text 23"/>
-          <p:cNvSpPr/>
-          <p:nvPr/>
-        </p:nvSpPr>
-        <p:spPr>
-          <a:xfrm>
-            <a:off x="1385888" y="4387100"/>
-            <a:ext cx="6786563" cy="248580"/>
+          <p:cNvPr id="27" name="Text 24"/>
+          <p:cNvSpPr/>
+          <p:nvPr/>
+        </p:nvSpPr>
+        <p:spPr>
+          <a:xfrm>
+            <a:off x="1385888" y="4289766"/>
+            <a:ext cx="7143750" cy="248580"/>
           </a:xfrm>
           <a:prstGeom prst="rect">
             <a:avLst/>
@@ -12361,7 +12481,7 @@
                 <a:ea typeface="DM Sans Bold" pitchFamily="34" charset="-122"/>
                 <a:cs typeface="DM Sans Bold" pitchFamily="34" charset="-120"/>
               </a:rPr>
-              <a:t>Précaution d’interprétation.</a:t>
+              <a:t>Règle de lecture.</a:t>
             </a:r>
             <a:r>
               <a:rPr lang="en-US" sz="600" dirty="0">
@@ -12372,7 +12492,7 @@
                 <a:ea typeface="DM Sans" pitchFamily="34" charset="-122"/>
                 <a:cs typeface="DM Sans" pitchFamily="34" charset="-120"/>
               </a:rPr>
-              <a:t> Le total 1 934 additionne deux statuts distincts. Il ne constitue pas automatiquement un taux individuel de réussite, car une trajectoire </a:t>
+              <a:t> Le corpus détaillé garde ses 3 555 lignes PDF ; le compteur corrigé ajoute séparément 3 ajournés hors PDF pour atteindre 3 558 candidatures. Le site officiel conserve 3 </a:t>
             </a:r>
             <a:r>
               <a:rPr lang="en-US" sz="600" dirty="0">
@@ -12383,7 +12503,7 @@
                 <a:ea typeface="DM Sans" pitchFamily="34" charset="-122"/>
                 <a:cs typeface="DM Sans" pitchFamily="34" charset="-120"/>
               </a:rPr>
-              <a:t>Prélabel → Label peut relier plusieurs étapes administratives.</a:t>
+              <a:t>079 candidatures. Pour S62, le site publie 39 candidatures et le PDF 46 lignes : 14 Labels détaillés comprennent 9 Labels initiaux et 5 conversions.</a:t>
             </a:r>
             <a:endParaRPr lang="en-US" sz="600" dirty="0"/>
           </a:p>
@@ -12457,10 +12577,6 @@
           </a:solidFill>
           <a:ln/>
         </p:spPr>
-        <p:txBody>
-          <a:bodyPr/>
-          <a:p/>
-        </p:txBody>
       </p:sp>
       <p:sp>
         <p:nvSpPr>
@@ -12511,8 +12627,8 @@
         </p:nvSpPr>
         <p:spPr>
           <a:xfrm rot="10800000">
-            <a:off x="348258" y="828675"/>
-            <a:ext cx="103584" cy="1460897"/>
+            <a:off x="353616" y="828675"/>
+            <a:ext cx="92869" cy="1564649"/>
           </a:xfrm>
           <a:prstGeom prst="rect">
             <a:avLst/>
@@ -12552,8 +12668,8 @@
         </p:nvSpPr>
         <p:spPr>
           <a:xfrm>
-            <a:off x="330398" y="2532459"/>
-            <a:ext cx="139303" cy="110728"/>
+            <a:off x="338044" y="2636211"/>
+            <a:ext cx="123955" cy="100013"/>
           </a:xfrm>
           <a:prstGeom prst="rect">
             <a:avLst/>
@@ -12594,7 +12710,7 @@
         <p:spPr>
           <a:xfrm>
             <a:off x="1343025" y="342900"/>
-            <a:ext cx="5857875" cy="110728"/>
+            <a:ext cx="5857875" cy="100013"/>
           </a:xfrm>
           <a:prstGeom prst="rect">
             <a:avLst/>
@@ -12634,7 +12750,7 @@
         </p:nvSpPr>
         <p:spPr>
           <a:xfrm>
-            <a:off x="1343025" y="539353"/>
+            <a:off x="1343025" y="528638"/>
             <a:ext cx="5857875" cy="657448"/>
           </a:xfrm>
           <a:prstGeom prst="rect">
@@ -12678,8 +12794,8 @@
         </p:nvSpPr>
         <p:spPr>
           <a:xfrm>
-            <a:off x="7983141" y="342900"/>
-            <a:ext cx="675084" cy="557213"/>
+            <a:off x="8101013" y="342900"/>
+            <a:ext cx="557213" cy="557213"/>
           </a:xfrm>
           <a:prstGeom prst="rect">
             <a:avLst/>
@@ -12722,8 +12838,8 @@
         </p:nvSpPr>
         <p:spPr>
           <a:xfrm>
-            <a:off x="1343025" y="1403970"/>
-            <a:ext cx="5429250" cy="2996803"/>
+            <a:off x="1343025" y="1393254"/>
+            <a:ext cx="5429250" cy="2986088"/>
           </a:xfrm>
           <a:prstGeom prst="rect">
             <a:avLst/>
@@ -12733,10 +12849,6 @@
           </a:solidFill>
           <a:ln/>
         </p:spPr>
-        <p:txBody>
-          <a:bodyPr/>
-          <a:p/>
-        </p:txBody>
       </p:sp>
       <p:sp>
         <p:nvSpPr>
@@ -12746,7 +12858,7 @@
         </p:nvSpPr>
         <p:spPr>
           <a:xfrm>
-            <a:off x="1343025" y="1403970"/>
+            <a:off x="1343025" y="1393254"/>
             <a:ext cx="5429250" cy="50006"/>
           </a:xfrm>
           <a:prstGeom prst="rect">
@@ -12757,10 +12869,6 @@
           </a:solidFill>
           <a:ln/>
         </p:spPr>
-        <p:txBody>
-          <a:bodyPr/>
-          <a:p/>
-        </p:txBody>
       </p:sp>
       <p:pic>
         <p:nvPicPr>
@@ -12778,7 +12886,7 @@
         </p:blipFill>
         <p:spPr>
           <a:xfrm>
-            <a:off x="1457325" y="1503983"/>
+            <a:off x="1457325" y="1493267"/>
             <a:ext cx="5200650" cy="2600325"/>
           </a:xfrm>
           <a:prstGeom prst="rect">
@@ -12794,8 +12902,8 @@
         </p:nvSpPr>
         <p:spPr>
           <a:xfrm>
-            <a:off x="1457325" y="4161458"/>
-            <a:ext cx="5200650" cy="103584"/>
+            <a:off x="1457325" y="4150742"/>
+            <a:ext cx="5200650" cy="92869"/>
           </a:xfrm>
           <a:prstGeom prst="rect">
             <a:avLst/>
@@ -12821,7 +12929,7 @@
                 <a:ea typeface="DM Sans" pitchFamily="34" charset="-122"/>
                 <a:cs typeface="DM Sans" pitchFamily="34" charset="-120"/>
               </a:rPr>
-              <a:t>Source : tableau corrigé des 85 sessions. Les valeurs 2026 couvrent trois sessions seulement.</a:t>
+              <a:t>Source : série officielle et exports audités des 88 sessions S0–S87. Les six sessions de 2026 couvrent janvier à juin.</a:t>
             </a:r>
             <a:endParaRPr lang="en-US" sz="550" dirty="0"/>
           </a:p>
@@ -12835,8 +12943,8 @@
         </p:nvSpPr>
         <p:spPr>
           <a:xfrm>
-            <a:off x="7072313" y="1518270"/>
-            <a:ext cx="1585913" cy="317897"/>
+            <a:off x="7072313" y="1507554"/>
+            <a:ext cx="1585913" cy="296466"/>
           </a:xfrm>
           <a:prstGeom prst="rect">
             <a:avLst/>
@@ -12876,8 +12984,8 @@
         </p:nvSpPr>
         <p:spPr>
           <a:xfrm>
-            <a:off x="7072313" y="1871886"/>
-            <a:ext cx="1585913" cy="132159"/>
+            <a:off x="7072313" y="1839739"/>
+            <a:ext cx="1585913" cy="114300"/>
           </a:xfrm>
           <a:prstGeom prst="rect">
             <a:avLst/>
@@ -12917,7 +13025,7 @@
         </p:nvSpPr>
         <p:spPr>
           <a:xfrm>
-            <a:off x="7072313" y="2046908"/>
+            <a:off x="7072313" y="1996901"/>
             <a:ext cx="1585913" cy="283964"/>
           </a:xfrm>
           <a:prstGeom prst="rect">
@@ -12961,8 +13069,8 @@
         </p:nvSpPr>
         <p:spPr>
           <a:xfrm>
-            <a:off x="7072313" y="2566615"/>
-            <a:ext cx="1585913" cy="317897"/>
+            <a:off x="7072313" y="2516609"/>
+            <a:ext cx="1585913" cy="296466"/>
           </a:xfrm>
           <a:prstGeom prst="rect">
             <a:avLst/>
@@ -12988,7 +13096,7 @@
                 <a:ea typeface="Libre Baskerville" pitchFamily="34" charset="-122"/>
                 <a:cs typeface="Libre Baskerville" pitchFamily="34" charset="-120"/>
               </a:rPr>
-              <a:t>245</a:t>
+              <a:t>243</a:t>
             </a:r>
             <a:endParaRPr lang="en-US" sz="1900" dirty="0"/>
           </a:p>
@@ -13002,8 +13110,8 @@
         </p:nvSpPr>
         <p:spPr>
           <a:xfrm>
-            <a:off x="7072313" y="2920231"/>
-            <a:ext cx="1585913" cy="132159"/>
+            <a:off x="7072313" y="2848794"/>
+            <a:ext cx="1585913" cy="114300"/>
           </a:xfrm>
           <a:prstGeom prst="rect">
             <a:avLst/>
@@ -13043,7 +13151,7 @@
         </p:nvSpPr>
         <p:spPr>
           <a:xfrm>
-            <a:off x="7072313" y="3095253"/>
+            <a:off x="7072313" y="3005956"/>
             <a:ext cx="1585913" cy="283964"/>
           </a:xfrm>
           <a:prstGeom prst="rect">
@@ -13087,8 +13195,8 @@
         </p:nvSpPr>
         <p:spPr>
           <a:xfrm>
-            <a:off x="7072313" y="3614961"/>
-            <a:ext cx="1585913" cy="317897"/>
+            <a:off x="7072313" y="3525664"/>
+            <a:ext cx="1585913" cy="296466"/>
           </a:xfrm>
           <a:prstGeom prst="rect">
             <a:avLst/>
@@ -13114,7 +13222,7 @@
                 <a:ea typeface="Libre Baskerville" pitchFamily="34" charset="-122"/>
                 <a:cs typeface="Libre Baskerville" pitchFamily="34" charset="-120"/>
               </a:rPr>
-              <a:t>3</a:t>
+              <a:t>6</a:t>
             </a:r>
             <a:endParaRPr lang="en-US" sz="1900" dirty="0"/>
           </a:p>
@@ -13128,8 +13236,8 @@
         </p:nvSpPr>
         <p:spPr>
           <a:xfrm>
-            <a:off x="7072313" y="3968576"/>
-            <a:ext cx="1585913" cy="132159"/>
+            <a:off x="7072313" y="3857848"/>
+            <a:ext cx="1585913" cy="114300"/>
           </a:xfrm>
           <a:prstGeom prst="rect">
             <a:avLst/>
@@ -13169,7 +13277,7 @@
         </p:nvSpPr>
         <p:spPr>
           <a:xfrm>
-            <a:off x="7072313" y="4143598"/>
+            <a:off x="7072313" y="4015011"/>
             <a:ext cx="1585913" cy="425946"/>
           </a:xfrm>
           <a:prstGeom prst="rect">
@@ -13199,7 +13307,7 @@
                 <a:ea typeface="DM Sans" pitchFamily="34" charset="-122"/>
                 <a:cs typeface="DM Sans" pitchFamily="34" charset="-120"/>
               </a:rPr>
-              <a:t>Une année partielle, non comparable directement à une année complète.</a:t>
+              <a:t>Janvier–juin, une année partielle non comparable directement à une année complète.</a:t>
             </a:r>
             <a:endParaRPr lang="en-US" sz="750" dirty="0"/>
           </a:p>
@@ -13213,7 +13321,7 @@
         </p:nvSpPr>
         <p:spPr>
           <a:xfrm>
-            <a:off x="1343025" y="4740994"/>
+            <a:off x="1343025" y="4612407"/>
             <a:ext cx="6500813" cy="217159"/>
           </a:xfrm>
           <a:prstGeom prst="rect">
@@ -13302,7 +13410,7 @@
         <p:spPr>
           <a:xfrm>
             <a:off x="0" y="0"/>
-            <a:ext cx="9144000" cy="5239606"/>
+            <a:ext cx="9144000" cy="5155443"/>
           </a:xfrm>
           <a:prstGeom prst="rect">
             <a:avLst/>
@@ -13318,7 +13426,7 @@
         <p:spPr>
           <a:xfrm>
             <a:off x="0" y="0"/>
-            <a:ext cx="800100" cy="5239606"/>
+            <a:ext cx="800100" cy="5155443"/>
           </a:xfrm>
           <a:prstGeom prst="rect">
             <a:avLst/>
@@ -13328,10 +13436,6 @@
           </a:solidFill>
           <a:ln/>
         </p:spPr>
-        <p:txBody>
-          <a:bodyPr/>
-          <a:p/>
-        </p:txBody>
       </p:sp>
       <p:sp>
         <p:nvSpPr>
@@ -13382,7 +13486,7 @@
         </p:nvSpPr>
         <p:spPr>
           <a:xfrm rot="10800000">
-            <a:off x="348258" y="2450139"/>
+            <a:off x="348258" y="2408058"/>
             <a:ext cx="103584" cy="600075"/>
           </a:xfrm>
           <a:prstGeom prst="rect">
@@ -13423,7 +13527,7 @@
         </p:nvSpPr>
         <p:spPr>
           <a:xfrm>
-            <a:off x="333970" y="4914565"/>
+            <a:off x="333970" y="4830403"/>
             <a:ext cx="132159" cy="110728"/>
           </a:xfrm>
           <a:prstGeom prst="rect">
@@ -13719,7 +13823,7 @@
         </p:nvSpPr>
         <p:spPr>
           <a:xfrm>
-            <a:off x="1357313" y="4163132"/>
+            <a:off x="1357313" y="4078970"/>
             <a:ext cx="1606060" cy="85725"/>
           </a:xfrm>
           <a:prstGeom prst="rect">
@@ -13730,10 +13834,6 @@
           </a:solidFill>
           <a:ln/>
         </p:spPr>
-        <p:txBody>
-          <a:bodyPr/>
-          <a:p/>
-        </p:txBody>
       </p:sp>
       <p:sp>
         <p:nvSpPr>
@@ -13743,7 +13843,7 @@
         </p:nvSpPr>
         <p:spPr>
           <a:xfrm>
-            <a:off x="1357313" y="4334582"/>
+            <a:off x="1357313" y="4250420"/>
             <a:ext cx="71438" cy="110728"/>
           </a:xfrm>
           <a:prstGeom prst="rect">
@@ -13784,7 +13884,7 @@
         </p:nvSpPr>
         <p:spPr>
           <a:xfrm>
-            <a:off x="2874187" y="4334582"/>
+            <a:off x="2874187" y="4250420"/>
             <a:ext cx="57150" cy="110728"/>
           </a:xfrm>
           <a:prstGeom prst="rect">
@@ -13825,7 +13925,7 @@
         </p:nvSpPr>
         <p:spPr>
           <a:xfrm>
-            <a:off x="4260242" y="4334582"/>
+            <a:off x="4260242" y="4250420"/>
             <a:ext cx="71438" cy="110728"/>
           </a:xfrm>
           <a:prstGeom prst="rect">
@@ -13866,7 +13966,7 @@
         </p:nvSpPr>
         <p:spPr>
           <a:xfrm>
-            <a:off x="2963373" y="4163132"/>
+            <a:off x="2963373" y="4078970"/>
             <a:ext cx="921990" cy="85725"/>
           </a:xfrm>
           <a:prstGeom prst="rect">
@@ -13877,10 +13977,6 @@
           </a:solidFill>
           <a:ln/>
         </p:spPr>
-        <p:txBody>
-          <a:bodyPr/>
-          <a:p/>
-        </p:txBody>
       </p:sp>
       <p:sp>
         <p:nvSpPr>
@@ -13890,7 +13986,7 @@
         </p:nvSpPr>
         <p:spPr>
           <a:xfrm>
-            <a:off x="1357313" y="4613188"/>
+            <a:off x="1357313" y="4529026"/>
             <a:ext cx="2974367" cy="279946"/>
           </a:xfrm>
           <a:prstGeom prst="rect">
@@ -14002,7 +14098,7 @@
                 <a:ea typeface="Libre Baskerville" pitchFamily="34" charset="-122"/>
                 <a:cs typeface="Libre Baskerville" pitchFamily="34" charset="-120"/>
               </a:rPr>
-              <a:t>r = 0,62</a:t>
+              <a:t>r = 0,59</a:t>
             </a:r>
             <a:endParaRPr lang="en-US" sz="1800" dirty="0"/>
           </a:p>
@@ -14017,7 +14113,7 @@
         <p:spPr>
           <a:xfrm>
             <a:off x="5053199" y="2333662"/>
-            <a:ext cx="1673870" cy="450056"/>
+            <a:ext cx="1673870" cy="300038"/>
           </a:xfrm>
           <a:prstGeom prst="rect">
             <a:avLst/>
@@ -14046,7 +14142,7 @@
                 <a:ea typeface="DM Sans" pitchFamily="34" charset="-122"/>
                 <a:cs typeface="DM Sans" pitchFamily="34" charset="-120"/>
               </a:rPr>
-              <a:t>Corrélation entre candidatures et nombre brut de Labels + Prélabels.</a:t>
+              <a:t>Corrélation entre candidatures et décisions positives officielles.</a:t>
             </a:r>
             <a:endParaRPr lang="en-US" sz="800" dirty="0"/>
           </a:p>
@@ -14172,7 +14268,7 @@
                 <a:ea typeface="DM Sans" pitchFamily="34" charset="-122"/>
                 <a:cs typeface="DM Sans" pitchFamily="34" charset="-120"/>
               </a:rPr>
-              <a:t>Taux de Label observé : 100 %.</a:t>
+              <a:t>Taux de Label observé : 86,7 %.</a:t>
             </a:r>
             <a:endParaRPr lang="en-US" sz="800" dirty="0"/>
           </a:p>
@@ -14186,7 +14282,7 @@
         </p:nvSpPr>
         <p:spPr>
           <a:xfrm>
-            <a:off x="5053199" y="3069468"/>
+            <a:off x="5053199" y="2919450"/>
             <a:ext cx="1673870" cy="139303"/>
           </a:xfrm>
           <a:prstGeom prst="rect">
@@ -14227,7 +14323,7 @@
         </p:nvSpPr>
         <p:spPr>
           <a:xfrm>
-            <a:off x="5053199" y="3273065"/>
+            <a:off x="5053199" y="3123047"/>
             <a:ext cx="1673870" cy="300038"/>
           </a:xfrm>
           <a:prstGeom prst="rect">
@@ -14268,7 +14364,7 @@
         </p:nvSpPr>
         <p:spPr>
           <a:xfrm>
-            <a:off x="5053199" y="3630253"/>
+            <a:off x="5053199" y="3480234"/>
             <a:ext cx="1673870" cy="150019"/>
           </a:xfrm>
           <a:prstGeom prst="rect">
@@ -14298,7 +14394,7 @@
                 <a:ea typeface="DM Sans" pitchFamily="34" charset="-122"/>
                 <a:cs typeface="DM Sans" pitchFamily="34" charset="-120"/>
               </a:rPr>
-              <a:t>Taux de Label observé : 18,2 %.</a:t>
+              <a:t>Taux de Label observé : 15,2 %.</a:t>
             </a:r>
             <a:endParaRPr lang="en-US" sz="800" dirty="0"/>
           </a:p>
@@ -14312,7 +14408,7 @@
         </p:nvSpPr>
         <p:spPr>
           <a:xfrm>
-            <a:off x="6941381" y="3069468"/>
+            <a:off x="6941381" y="2919450"/>
             <a:ext cx="1673926" cy="139303"/>
           </a:xfrm>
           <a:prstGeom prst="rect">
@@ -14353,7 +14449,7 @@
         </p:nvSpPr>
         <p:spPr>
           <a:xfrm>
-            <a:off x="6941381" y="3273065"/>
+            <a:off x="6941381" y="3123047"/>
             <a:ext cx="1673926" cy="300038"/>
           </a:xfrm>
           <a:prstGeom prst="rect">
@@ -14394,7 +14490,7 @@
         </p:nvSpPr>
         <p:spPr>
           <a:xfrm>
-            <a:off x="6941381" y="3630253"/>
+            <a:off x="6941381" y="3480234"/>
             <a:ext cx="1673926" cy="300038"/>
           </a:xfrm>
           <a:prstGeom prst="rect">
@@ -14438,7 +14534,7 @@
         </p:nvSpPr>
         <p:spPr>
           <a:xfrm>
-            <a:off x="5053199" y="4116028"/>
+            <a:off x="5053199" y="3966009"/>
             <a:ext cx="3562108" cy="777106"/>
           </a:xfrm>
           <a:prstGeom prst="rect">
@@ -14490,7 +14586,7 @@
                 <a:ea typeface="DM Sans" pitchFamily="34" charset="-122"/>
                 <a:cs typeface="DM Sans" pitchFamily="34" charset="-120"/>
               </a:rPr>
-              <a:t>association dans 85 sessions. Ils ne démontrent ni qu’un volume </a:t>
+              <a:t>association dans 88 sessions. Ils ne démontrent ni qu’un volume </a:t>
             </a:r>
             <a:r>
               <a:rPr lang="en-US" sz="850" dirty="0">
@@ -14526,7 +14622,7 @@
         </p:nvSpPr>
         <p:spPr>
           <a:xfrm>
-            <a:off x="1357313" y="5021721"/>
+            <a:off x="1357313" y="4937559"/>
             <a:ext cx="7258050" cy="110728"/>
           </a:xfrm>
           <a:prstGeom prst="rect">
@@ -14553,7 +14649,7 @@
                 <a:ea typeface="DM Sans" pitchFamily="34" charset="-122"/>
                 <a:cs typeface="DM Sans" pitchFamily="34" charset="-120"/>
               </a:rPr>
-              <a:t>Source : calculs de l’étude à partir du tableau corrigé des 85 sessions ; corrélations de Pearson descriptives.</a:t>
+              <a:t>Source : calculs de l’étude à partir de la série officielle des 88 sessions ; corrélations de Pearson descriptives.</a:t>
             </a:r>
             <a:endParaRPr lang="en-US" sz="600" dirty="0"/>
           </a:p>
@@ -14627,10 +14723,6 @@
           </a:solidFill>
           <a:ln/>
         </p:spPr>
-        <p:txBody>
-          <a:bodyPr/>
-          <a:p/>
-        </p:txBody>
       </p:sp>
       <p:sp>
         <p:nvSpPr>
@@ -14903,10 +14995,6 @@
           </a:solidFill>
           <a:ln/>
         </p:spPr>
-        <p:txBody>
-          <a:bodyPr/>
-          <a:p/>
-        </p:txBody>
       </p:sp>
       <p:sp>
         <p:nvSpPr>
@@ -14927,10 +15015,6 @@
           </a:solidFill>
           <a:ln/>
         </p:spPr>
-        <p:txBody>
-          <a:bodyPr/>
-          <a:p/>
-        </p:txBody>
       </p:sp>
       <p:pic>
         <p:nvPicPr>
